--- a/.lessons/54 Slider Features/11 Slider- Show Sliders at frontend/1.pptx
+++ b/.lessons/54 Slider Features/11 Slider- Show Sliders at frontend/1.pptx
@@ -8,6 +8,21 @@
     <p:sldId id="413" r:id="rId2"/>
     <p:sldId id="414" r:id="rId3"/>
     <p:sldId id="400" r:id="rId4"/>
+    <p:sldId id="415" r:id="rId5"/>
+    <p:sldId id="416" r:id="rId6"/>
+    <p:sldId id="418" r:id="rId7"/>
+    <p:sldId id="419" r:id="rId8"/>
+    <p:sldId id="420" r:id="rId9"/>
+    <p:sldId id="421" r:id="rId10"/>
+    <p:sldId id="423" r:id="rId11"/>
+    <p:sldId id="424" r:id="rId12"/>
+    <p:sldId id="426" r:id="rId13"/>
+    <p:sldId id="425" r:id="rId14"/>
+    <p:sldId id="417" r:id="rId15"/>
+    <p:sldId id="427" r:id="rId16"/>
+    <p:sldId id="428" r:id="rId17"/>
+    <p:sldId id="429" r:id="rId18"/>
+    <p:sldId id="430" r:id="rId19"/>
   </p:sldIdLst>
   <p:sldSz cx="12192000" cy="6858000"/>
   <p:notesSz cx="6858000" cy="9144000"/>
@@ -261,7 +276,7 @@
           <a:p>
             <a:fld id="{3E102D2E-813C-461C-9963-687A650C48C0}" type="datetimeFigureOut">
               <a:rPr lang="en-US" smtClean="0"/>
-              <a:t>6/26/2025</a:t>
+              <a:t>8/10/2025</a:t>
             </a:fld>
             <a:endParaRPr lang="en-US"/>
           </a:p>
@@ -459,7 +474,7 @@
           <a:p>
             <a:fld id="{3E102D2E-813C-461C-9963-687A650C48C0}" type="datetimeFigureOut">
               <a:rPr lang="en-US" smtClean="0"/>
-              <a:t>6/26/2025</a:t>
+              <a:t>8/10/2025</a:t>
             </a:fld>
             <a:endParaRPr lang="en-US"/>
           </a:p>
@@ -667,7 +682,7 @@
           <a:p>
             <a:fld id="{3E102D2E-813C-461C-9963-687A650C48C0}" type="datetimeFigureOut">
               <a:rPr lang="en-US" smtClean="0"/>
-              <a:t>6/26/2025</a:t>
+              <a:t>8/10/2025</a:t>
             </a:fld>
             <a:endParaRPr lang="en-US"/>
           </a:p>
@@ -865,7 +880,7 @@
           <a:p>
             <a:fld id="{3E102D2E-813C-461C-9963-687A650C48C0}" type="datetimeFigureOut">
               <a:rPr lang="en-US" smtClean="0"/>
-              <a:t>6/26/2025</a:t>
+              <a:t>8/10/2025</a:t>
             </a:fld>
             <a:endParaRPr lang="en-US"/>
           </a:p>
@@ -1140,7 +1155,7 @@
           <a:p>
             <a:fld id="{3E102D2E-813C-461C-9963-687A650C48C0}" type="datetimeFigureOut">
               <a:rPr lang="en-US" smtClean="0"/>
-              <a:t>6/26/2025</a:t>
+              <a:t>8/10/2025</a:t>
             </a:fld>
             <a:endParaRPr lang="en-US"/>
           </a:p>
@@ -1405,7 +1420,7 @@
           <a:p>
             <a:fld id="{3E102D2E-813C-461C-9963-687A650C48C0}" type="datetimeFigureOut">
               <a:rPr lang="en-US" smtClean="0"/>
-              <a:t>6/26/2025</a:t>
+              <a:t>8/10/2025</a:t>
             </a:fld>
             <a:endParaRPr lang="en-US"/>
           </a:p>
@@ -1817,7 +1832,7 @@
           <a:p>
             <a:fld id="{3E102D2E-813C-461C-9963-687A650C48C0}" type="datetimeFigureOut">
               <a:rPr lang="en-US" smtClean="0"/>
-              <a:t>6/26/2025</a:t>
+              <a:t>8/10/2025</a:t>
             </a:fld>
             <a:endParaRPr lang="en-US"/>
           </a:p>
@@ -1958,7 +1973,7 @@
           <a:p>
             <a:fld id="{3E102D2E-813C-461C-9963-687A650C48C0}" type="datetimeFigureOut">
               <a:rPr lang="en-US" smtClean="0"/>
-              <a:t>6/26/2025</a:t>
+              <a:t>8/10/2025</a:t>
             </a:fld>
             <a:endParaRPr lang="en-US"/>
           </a:p>
@@ -2071,7 +2086,7 @@
           <a:p>
             <a:fld id="{3E102D2E-813C-461C-9963-687A650C48C0}" type="datetimeFigureOut">
               <a:rPr lang="en-US" smtClean="0"/>
-              <a:t>6/26/2025</a:t>
+              <a:t>8/10/2025</a:t>
             </a:fld>
             <a:endParaRPr lang="en-US"/>
           </a:p>
@@ -2382,7 +2397,7 @@
           <a:p>
             <a:fld id="{3E102D2E-813C-461C-9963-687A650C48C0}" type="datetimeFigureOut">
               <a:rPr lang="en-US" smtClean="0"/>
-              <a:t>6/26/2025</a:t>
+              <a:t>8/10/2025</a:t>
             </a:fld>
             <a:endParaRPr lang="en-US"/>
           </a:p>
@@ -2670,7 +2685,7 @@
           <a:p>
             <a:fld id="{3E102D2E-813C-461C-9963-687A650C48C0}" type="datetimeFigureOut">
               <a:rPr lang="en-US" smtClean="0"/>
-              <a:t>6/26/2025</a:t>
+              <a:t>8/10/2025</a:t>
             </a:fld>
             <a:endParaRPr lang="en-US"/>
           </a:p>
@@ -2911,7 +2926,7 @@
           <a:p>
             <a:fld id="{3E102D2E-813C-461C-9963-687A650C48C0}" type="datetimeFigureOut">
               <a:rPr lang="en-US" smtClean="0"/>
-              <a:t>6/26/2025</a:t>
+              <a:t>8/10/2025</a:t>
             </a:fld>
             <a:endParaRPr lang="en-US"/>
           </a:p>
@@ -3348,6 +3363,2497 @@
         </p:nvSpPr>
         <p:spPr>
           <a:xfrm>
+            <a:off x="0" y="107265"/>
+            <a:ext cx="12192000" cy="1166153"/>
+          </a:xfrm>
+          <a:prstGeom prst="rect">
+            <a:avLst/>
+          </a:prstGeom>
+          <a:noFill/>
+        </p:spPr>
+        <p:txBody>
+          <a:bodyPr wrap="square">
+            <a:spAutoFit/>
+          </a:bodyPr>
+          <a:lstStyle/>
+          <a:p>
+            <a:pPr>
+              <a:lnSpc>
+                <a:spcPct val="150000"/>
+              </a:lnSpc>
+              <a:buNone/>
+            </a:pPr>
+            <a:r>
+              <a:rPr lang="az-Latn-AZ" altLang="en-US" sz="1200">
+                <a:latin typeface="Arial" panose="020B0604020202020204" pitchFamily="34" charset="0"/>
+              </a:rPr>
+              <a:t>Bu dərs, </a:t>
+            </a:r>
+            <a:r>
+              <a:rPr lang="az-Latn-AZ" altLang="en-US" sz="1200" b="1">
+                <a:latin typeface="Arial" panose="020B0604020202020204" pitchFamily="34" charset="0"/>
+              </a:rPr>
+              <a:t>Admin paneldən </a:t>
+            </a:r>
+            <a:r>
+              <a:rPr lang="az-Latn-AZ" altLang="en-US" sz="1200">
+                <a:latin typeface="Arial" panose="020B0604020202020204" pitchFamily="34" charset="0"/>
+              </a:rPr>
+              <a:t>istifadə edərək </a:t>
+            </a:r>
+            <a:r>
+              <a:rPr lang="az-Latn-AZ" altLang="en-US" sz="1200" b="1">
+                <a:latin typeface="Arial" panose="020B0604020202020204" pitchFamily="34" charset="0"/>
+              </a:rPr>
+              <a:t>Slider cədvəlinə </a:t>
+            </a:r>
+            <a:r>
+              <a:rPr lang="az-Latn-AZ" altLang="en-US" sz="1200">
+                <a:latin typeface="Arial" panose="020B0604020202020204" pitchFamily="34" charset="0"/>
+              </a:rPr>
+              <a:t>əlavə edilən </a:t>
+            </a:r>
+            <a:r>
+              <a:rPr lang="az-Latn-AZ" altLang="en-US" sz="1200" b="1">
+                <a:latin typeface="Arial" panose="020B0604020202020204" pitchFamily="34" charset="0"/>
+              </a:rPr>
+              <a:t>dataları</a:t>
+            </a:r>
+            <a:r>
+              <a:rPr lang="az-Latn-AZ" altLang="en-US" sz="1200">
+                <a:latin typeface="Arial" panose="020B0604020202020204" pitchFamily="34" charset="0"/>
+              </a:rPr>
+              <a:t>, `</a:t>
+            </a:r>
+            <a:r>
+              <a:rPr lang="en-US" altLang="en-US" sz="1200" b="1">
+                <a:solidFill>
+                  <a:srgbClr val="00B050"/>
+                </a:solidFill>
+                <a:latin typeface="Arial" panose="020B0604020202020204" pitchFamily="34" charset="0"/>
+              </a:rPr>
+              <a:t>resources\views\frontend\home\</a:t>
+            </a:r>
+            <a:r>
+              <a:rPr lang="en-US" altLang="en-US" sz="1200" b="1" u="sng">
+                <a:solidFill>
+                  <a:srgbClr val="00B050"/>
+                </a:solidFill>
+                <a:latin typeface="Arial" panose="020B0604020202020204" pitchFamily="34" charset="0"/>
+              </a:rPr>
+              <a:t>home.blade.php</a:t>
+            </a:r>
+            <a:r>
+              <a:rPr lang="az-Latn-AZ" altLang="en-US" sz="1200">
+                <a:latin typeface="Arial" panose="020B0604020202020204" pitchFamily="34" charset="0"/>
+              </a:rPr>
+              <a:t>` şablonunda əks etdirəcəyik.</a:t>
+            </a:r>
+          </a:p>
+          <a:p>
+            <a:pPr>
+              <a:lnSpc>
+                <a:spcPct val="150000"/>
+              </a:lnSpc>
+              <a:buNone/>
+            </a:pPr>
+            <a:endParaRPr kumimoji="0" lang="az-Latn-AZ" altLang="en-US" sz="1200" b="0" i="0" u="none" strike="noStrike" cap="none" normalizeH="0" baseline="0">
+              <a:ln>
+                <a:noFill/>
+              </a:ln>
+              <a:solidFill>
+                <a:schemeClr val="tx1"/>
+              </a:solidFill>
+              <a:effectLst/>
+              <a:latin typeface="Arial" panose="020B0604020202020204" pitchFamily="34" charset="0"/>
+            </a:endParaRPr>
+          </a:p>
+          <a:p>
+            <a:pPr>
+              <a:lnSpc>
+                <a:spcPct val="150000"/>
+              </a:lnSpc>
+              <a:buNone/>
+            </a:pPr>
+            <a:r>
+              <a:rPr lang="az-Latn-AZ" altLang="en-US" sz="1200">
+                <a:latin typeface="Arial" panose="020B0604020202020204" pitchFamily="34" charset="0"/>
+              </a:rPr>
+              <a:t>`</a:t>
+            </a:r>
+            <a:r>
+              <a:rPr lang="en-US" altLang="en-US" sz="1200" b="1" u="sng">
+                <a:solidFill>
+                  <a:srgbClr val="00B050"/>
+                </a:solidFill>
+                <a:latin typeface="Arial" panose="020B0604020202020204" pitchFamily="34" charset="0"/>
+              </a:rPr>
+              <a:t>home.blade.php</a:t>
+            </a:r>
+            <a:r>
+              <a:rPr lang="az-Latn-AZ" altLang="en-US" sz="1200">
+                <a:latin typeface="Arial" panose="020B0604020202020204" pitchFamily="34" charset="0"/>
+              </a:rPr>
+              <a:t>` şablonunda əks etdirmək dedikdə əslində, `</a:t>
+            </a:r>
+            <a:r>
+              <a:rPr lang="en-US" altLang="en-US" sz="1200" b="1">
+                <a:latin typeface="Arial" panose="020B0604020202020204" pitchFamily="34" charset="0"/>
+              </a:rPr>
+              <a:t>resources\views\frontend\home\sections\</a:t>
+            </a:r>
+            <a:r>
+              <a:rPr lang="en-US" altLang="en-US" sz="1200" b="1" u="sng">
+                <a:solidFill>
+                  <a:srgbClr val="0070C0"/>
+                </a:solidFill>
+                <a:latin typeface="Arial" panose="020B0604020202020204" pitchFamily="34" charset="0"/>
+              </a:rPr>
+              <a:t>banner-slider.blade.php</a:t>
+            </a:r>
+            <a:r>
+              <a:rPr lang="az-Latn-AZ" altLang="en-US" sz="1200">
+                <a:latin typeface="Arial" panose="020B0604020202020204" pitchFamily="34" charset="0"/>
+              </a:rPr>
+              <a:t>` faylını nəzərdə tuturuq. Çünki bu fayl həmin `</a:t>
+            </a:r>
+            <a:r>
+              <a:rPr lang="az-Latn-AZ" altLang="en-US" sz="1200" b="1">
+                <a:latin typeface="Arial" panose="020B0604020202020204" pitchFamily="34" charset="0"/>
+              </a:rPr>
+              <a:t>home.blade.php</a:t>
+            </a:r>
+            <a:r>
+              <a:rPr lang="az-Latn-AZ" altLang="en-US" sz="1200">
+                <a:latin typeface="Arial" panose="020B0604020202020204" pitchFamily="34" charset="0"/>
+              </a:rPr>
+              <a:t>` faylına </a:t>
+            </a:r>
+            <a:r>
+              <a:rPr lang="en-US" altLang="en-US" sz="1200" b="1">
+                <a:solidFill>
+                  <a:srgbClr val="7030A0"/>
+                </a:solidFill>
+                <a:latin typeface="Arial" panose="020B0604020202020204" pitchFamily="34" charset="0"/>
+              </a:rPr>
+              <a:t>@include </a:t>
+            </a:r>
+            <a:r>
+              <a:rPr lang="az-Latn-AZ" altLang="en-US" sz="1200">
+                <a:latin typeface="Arial" panose="020B0604020202020204" pitchFamily="34" charset="0"/>
+              </a:rPr>
+              <a:t>edilir.</a:t>
+            </a:r>
+            <a:endParaRPr kumimoji="0" lang="en-US" altLang="en-US" sz="1200" b="0" i="0" u="none" strike="noStrike" cap="none" normalizeH="0" baseline="0">
+              <a:ln>
+                <a:noFill/>
+              </a:ln>
+              <a:solidFill>
+                <a:schemeClr val="tx1"/>
+              </a:solidFill>
+              <a:effectLst/>
+              <a:latin typeface="Arial" panose="020B0604020202020204" pitchFamily="34" charset="0"/>
+            </a:endParaRPr>
+          </a:p>
+        </p:txBody>
+      </p:sp>
+      <p:pic>
+        <p:nvPicPr>
+          <p:cNvPr id="4" name="Picture 3">
+            <a:extLst>
+              <a:ext uri="{FF2B5EF4-FFF2-40B4-BE49-F238E27FC236}">
+                <a16:creationId xmlns:a16="http://schemas.microsoft.com/office/drawing/2014/main" id="{33C3CE09-F514-CBA6-551F-F46F6F8562BD}"/>
+              </a:ext>
+            </a:extLst>
+          </p:cNvPr>
+          <p:cNvPicPr>
+            <a:picLocks noChangeAspect="1"/>
+          </p:cNvPicPr>
+          <p:nvPr/>
+        </p:nvPicPr>
+        <p:blipFill>
+          <a:blip r:embed="rId2"/>
+          <a:stretch>
+            <a:fillRect/>
+          </a:stretch>
+        </p:blipFill>
+        <p:spPr>
+          <a:xfrm>
+            <a:off x="2650228" y="1865744"/>
+            <a:ext cx="9541772" cy="4992255"/>
+          </a:xfrm>
+          <a:prstGeom prst="rect">
+            <a:avLst/>
+          </a:prstGeom>
+        </p:spPr>
+      </p:pic>
+    </p:spTree>
+    <p:extLst>
+      <p:ext uri="{BB962C8B-B14F-4D97-AF65-F5344CB8AC3E}">
+        <p14:creationId xmlns:p14="http://schemas.microsoft.com/office/powerpoint/2010/main" val="3863838039"/>
+      </p:ext>
+    </p:extLst>
+  </p:cSld>
+  <p:clrMapOvr>
+    <a:masterClrMapping/>
+  </p:clrMapOvr>
+</p:sld>
+</file>
+
+<file path=ppt/slides/slide10.xml><?xml version="1.0" encoding="utf-8"?>
+<p:sld xmlns:a="http://schemas.openxmlformats.org/drawingml/2006/main" xmlns:r="http://schemas.openxmlformats.org/officeDocument/2006/relationships" xmlns:p="http://schemas.openxmlformats.org/presentationml/2006/main">
+  <p:cSld>
+    <p:spTree>
+      <p:nvGrpSpPr>
+        <p:cNvPr id="1" name="">
+          <a:extLst>
+            <a:ext uri="{FF2B5EF4-FFF2-40B4-BE49-F238E27FC236}">
+              <a16:creationId xmlns:a16="http://schemas.microsoft.com/office/drawing/2014/main" id="{E87C4642-517A-555A-3537-72BC824B5BD1}"/>
+            </a:ext>
+          </a:extLst>
+        </p:cNvPr>
+        <p:cNvGrpSpPr/>
+        <p:nvPr/>
+      </p:nvGrpSpPr>
+      <p:grpSpPr>
+        <a:xfrm>
+          <a:off x="0" y="0"/>
+          <a:ext cx="0" cy="0"/>
+          <a:chOff x="0" y="0"/>
+          <a:chExt cx="0" cy="0"/>
+        </a:xfrm>
+      </p:grpSpPr>
+      <p:sp>
+        <p:nvSpPr>
+          <p:cNvPr id="3" name="TextBox 2">
+            <a:extLst>
+              <a:ext uri="{FF2B5EF4-FFF2-40B4-BE49-F238E27FC236}">
+                <a16:creationId xmlns:a16="http://schemas.microsoft.com/office/drawing/2014/main" id="{8A34726F-5962-56A9-3460-D5BDC9F614C7}"/>
+              </a:ext>
+            </a:extLst>
+          </p:cNvPr>
+          <p:cNvSpPr txBox="1"/>
+          <p:nvPr/>
+        </p:nvSpPr>
+        <p:spPr>
+          <a:xfrm>
+            <a:off x="217714" y="255046"/>
+            <a:ext cx="11756571" cy="3956339"/>
+          </a:xfrm>
+          <a:prstGeom prst="rect">
+            <a:avLst/>
+          </a:prstGeom>
+          <a:noFill/>
+        </p:spPr>
+        <p:txBody>
+          <a:bodyPr wrap="square">
+            <a:spAutoFit/>
+          </a:bodyPr>
+          <a:lstStyle/>
+          <a:p>
+            <a:pPr>
+              <a:lnSpc>
+                <a:spcPct val="150000"/>
+              </a:lnSpc>
+              <a:buNone/>
+            </a:pPr>
+            <a:r>
+              <a:rPr lang="en-US" altLang="en-US" sz="1300">
+                <a:latin typeface="Arial" panose="020B0604020202020204" pitchFamily="34" charset="0"/>
+              </a:rPr>
+              <a:t>Blade-də istifadə</a:t>
+            </a:r>
+            <a:r>
+              <a:rPr lang="az-Latn-AZ" altLang="en-US" sz="1300">
+                <a:latin typeface="Arial" panose="020B0604020202020204" pitchFamily="34" charset="0"/>
+              </a:rPr>
+              <a:t>:</a:t>
+            </a:r>
+          </a:p>
+          <a:p>
+            <a:pPr>
+              <a:lnSpc>
+                <a:spcPct val="150000"/>
+              </a:lnSpc>
+              <a:buNone/>
+            </a:pPr>
+            <a:endParaRPr kumimoji="0" lang="az-Latn-AZ" altLang="en-US" sz="1300" b="0" i="0" u="none" strike="noStrike" cap="none" normalizeH="0" baseline="0">
+              <a:ln>
+                <a:noFill/>
+              </a:ln>
+              <a:solidFill>
+                <a:schemeClr val="tx1"/>
+              </a:solidFill>
+              <a:effectLst/>
+              <a:latin typeface="Arial" panose="020B0604020202020204" pitchFamily="34" charset="0"/>
+            </a:endParaRPr>
+          </a:p>
+          <a:p>
+            <a:pPr>
+              <a:lnSpc>
+                <a:spcPct val="150000"/>
+              </a:lnSpc>
+              <a:buNone/>
+            </a:pPr>
+            <a:endParaRPr lang="az-Latn-AZ" altLang="en-US" sz="1300">
+              <a:latin typeface="Arial" panose="020B0604020202020204" pitchFamily="34" charset="0"/>
+            </a:endParaRPr>
+          </a:p>
+          <a:p>
+            <a:pPr>
+              <a:lnSpc>
+                <a:spcPct val="150000"/>
+              </a:lnSpc>
+              <a:buNone/>
+            </a:pPr>
+            <a:endParaRPr kumimoji="0" lang="az-Latn-AZ" altLang="en-US" sz="1300" b="0" i="0" u="none" strike="noStrike" cap="none" normalizeH="0" baseline="0">
+              <a:ln>
+                <a:noFill/>
+              </a:ln>
+              <a:solidFill>
+                <a:schemeClr val="tx1"/>
+              </a:solidFill>
+              <a:effectLst/>
+              <a:latin typeface="Arial" panose="020B0604020202020204" pitchFamily="34" charset="0"/>
+            </a:endParaRPr>
+          </a:p>
+          <a:p>
+            <a:pPr>
+              <a:lnSpc>
+                <a:spcPct val="150000"/>
+              </a:lnSpc>
+              <a:buNone/>
+            </a:pPr>
+            <a:endParaRPr lang="az-Latn-AZ" altLang="en-US" sz="1300">
+              <a:latin typeface="Arial" panose="020B0604020202020204" pitchFamily="34" charset="0"/>
+            </a:endParaRPr>
+          </a:p>
+          <a:p>
+            <a:pPr>
+              <a:lnSpc>
+                <a:spcPct val="150000"/>
+              </a:lnSpc>
+              <a:buNone/>
+            </a:pPr>
+            <a:endParaRPr kumimoji="0" lang="az-Latn-AZ" altLang="en-US" sz="1300" b="0" i="0" u="none" strike="noStrike" cap="none" normalizeH="0" baseline="0">
+              <a:ln>
+                <a:noFill/>
+              </a:ln>
+              <a:solidFill>
+                <a:schemeClr val="tx1"/>
+              </a:solidFill>
+              <a:effectLst/>
+              <a:latin typeface="Arial" panose="020B0604020202020204" pitchFamily="34" charset="0"/>
+            </a:endParaRPr>
+          </a:p>
+          <a:p>
+            <a:pPr>
+              <a:lnSpc>
+                <a:spcPct val="150000"/>
+              </a:lnSpc>
+              <a:buNone/>
+            </a:pPr>
+            <a:r>
+              <a:rPr lang="en-US" altLang="en-US" sz="1300">
+                <a:latin typeface="Arial" panose="020B0604020202020204" pitchFamily="34" charset="0"/>
+              </a:rPr>
+              <a:t>Əgər:</a:t>
+            </a:r>
+            <a:endParaRPr lang="az-Latn-AZ" altLang="en-US" sz="1300">
+              <a:latin typeface="Arial" panose="020B0604020202020204" pitchFamily="34" charset="0"/>
+            </a:endParaRPr>
+          </a:p>
+          <a:p>
+            <a:pPr>
+              <a:lnSpc>
+                <a:spcPct val="150000"/>
+              </a:lnSpc>
+              <a:buNone/>
+            </a:pPr>
+            <a:endParaRPr kumimoji="0" lang="az-Latn-AZ" altLang="en-US" sz="1300" b="0" i="0" u="none" strike="noStrike" cap="none" normalizeH="0" baseline="0">
+              <a:ln>
+                <a:noFill/>
+              </a:ln>
+              <a:solidFill>
+                <a:schemeClr val="tx1"/>
+              </a:solidFill>
+              <a:effectLst/>
+              <a:latin typeface="Arial" panose="020B0604020202020204" pitchFamily="34" charset="0"/>
+            </a:endParaRPr>
+          </a:p>
+          <a:p>
+            <a:pPr>
+              <a:lnSpc>
+                <a:spcPct val="150000"/>
+              </a:lnSpc>
+              <a:buNone/>
+            </a:pPr>
+            <a:endParaRPr lang="az-Latn-AZ" altLang="en-US" sz="1300">
+              <a:latin typeface="Arial" panose="020B0604020202020204" pitchFamily="34" charset="0"/>
+            </a:endParaRPr>
+          </a:p>
+          <a:p>
+            <a:pPr>
+              <a:lnSpc>
+                <a:spcPct val="150000"/>
+              </a:lnSpc>
+              <a:buNone/>
+            </a:pPr>
+            <a:endParaRPr kumimoji="0" lang="az-Latn-AZ" altLang="en-US" sz="1300" b="0" i="0" u="none" strike="noStrike" cap="none" normalizeH="0" baseline="0">
+              <a:ln>
+                <a:noFill/>
+              </a:ln>
+              <a:solidFill>
+                <a:schemeClr val="tx1"/>
+              </a:solidFill>
+              <a:effectLst/>
+              <a:latin typeface="Arial" panose="020B0604020202020204" pitchFamily="34" charset="0"/>
+            </a:endParaRPr>
+          </a:p>
+          <a:p>
+            <a:pPr>
+              <a:lnSpc>
+                <a:spcPct val="150000"/>
+              </a:lnSpc>
+              <a:buNone/>
+            </a:pPr>
+            <a:endParaRPr lang="az-Latn-AZ" altLang="en-US" sz="1300">
+              <a:latin typeface="Arial" panose="020B0604020202020204" pitchFamily="34" charset="0"/>
+            </a:endParaRPr>
+          </a:p>
+          <a:p>
+            <a:pPr>
+              <a:lnSpc>
+                <a:spcPct val="150000"/>
+              </a:lnSpc>
+              <a:buNone/>
+            </a:pPr>
+            <a:endParaRPr kumimoji="0" lang="az-Latn-AZ" altLang="en-US" sz="1300" b="0" i="0" u="none" strike="noStrike" cap="none" normalizeH="0" baseline="0">
+              <a:ln>
+                <a:noFill/>
+              </a:ln>
+              <a:solidFill>
+                <a:schemeClr val="tx1"/>
+              </a:solidFill>
+              <a:effectLst/>
+              <a:latin typeface="Arial" panose="020B0604020202020204" pitchFamily="34" charset="0"/>
+            </a:endParaRPr>
+          </a:p>
+          <a:p>
+            <a:pPr>
+              <a:lnSpc>
+                <a:spcPct val="150000"/>
+              </a:lnSpc>
+              <a:buNone/>
+            </a:pPr>
+            <a:r>
+              <a:rPr lang="az-Latn-AZ" altLang="en-US" sz="1300">
+                <a:latin typeface="Arial" panose="020B0604020202020204" pitchFamily="34" charset="0"/>
+              </a:rPr>
+              <a:t>Ç</a:t>
+            </a:r>
+            <a:r>
+              <a:rPr lang="en-US" altLang="en-US" sz="1300">
+                <a:latin typeface="Arial" panose="020B0604020202020204" pitchFamily="34" charset="0"/>
+              </a:rPr>
+              <a:t>ıxış:</a:t>
+            </a:r>
+            <a:endParaRPr kumimoji="0" lang="en-US" altLang="en-US" sz="1300" b="0" i="0" u="none" strike="noStrike" cap="none" normalizeH="0" baseline="0">
+              <a:ln>
+                <a:noFill/>
+              </a:ln>
+              <a:solidFill>
+                <a:schemeClr val="tx1"/>
+              </a:solidFill>
+              <a:effectLst/>
+              <a:latin typeface="Arial" panose="020B0604020202020204" pitchFamily="34" charset="0"/>
+            </a:endParaRPr>
+          </a:p>
+        </p:txBody>
+      </p:sp>
+      <p:pic>
+        <p:nvPicPr>
+          <p:cNvPr id="4" name="Picture 3">
+            <a:extLst>
+              <a:ext uri="{FF2B5EF4-FFF2-40B4-BE49-F238E27FC236}">
+                <a16:creationId xmlns:a16="http://schemas.microsoft.com/office/drawing/2014/main" id="{DAC59F19-5365-458F-1604-3E68E997FAAD}"/>
+              </a:ext>
+            </a:extLst>
+          </p:cNvPr>
+          <p:cNvPicPr>
+            <a:picLocks noChangeAspect="1"/>
+          </p:cNvPicPr>
+          <p:nvPr/>
+        </p:nvPicPr>
+        <p:blipFill>
+          <a:blip r:embed="rId2"/>
+          <a:stretch>
+            <a:fillRect/>
+          </a:stretch>
+        </p:blipFill>
+        <p:spPr>
+          <a:xfrm>
+            <a:off x="0" y="794730"/>
+            <a:ext cx="2410161" cy="428685"/>
+          </a:xfrm>
+          <a:prstGeom prst="rect">
+            <a:avLst/>
+          </a:prstGeom>
+        </p:spPr>
+      </p:pic>
+      <p:pic>
+        <p:nvPicPr>
+          <p:cNvPr id="6" name="Picture 5">
+            <a:extLst>
+              <a:ext uri="{FF2B5EF4-FFF2-40B4-BE49-F238E27FC236}">
+                <a16:creationId xmlns:a16="http://schemas.microsoft.com/office/drawing/2014/main" id="{DFEC319E-B38E-6C3C-83BD-F445D4CB6789}"/>
+              </a:ext>
+            </a:extLst>
+          </p:cNvPr>
+          <p:cNvPicPr>
+            <a:picLocks noChangeAspect="1"/>
+          </p:cNvPicPr>
+          <p:nvPr/>
+        </p:nvPicPr>
+        <p:blipFill>
+          <a:blip r:embed="rId3"/>
+          <a:stretch>
+            <a:fillRect/>
+          </a:stretch>
+        </p:blipFill>
+        <p:spPr>
+          <a:xfrm>
+            <a:off x="0" y="2465896"/>
+            <a:ext cx="5249008" cy="447737"/>
+          </a:xfrm>
+          <a:prstGeom prst="rect">
+            <a:avLst/>
+          </a:prstGeom>
+        </p:spPr>
+      </p:pic>
+      <p:pic>
+        <p:nvPicPr>
+          <p:cNvPr id="8" name="Picture 7">
+            <a:extLst>
+              <a:ext uri="{FF2B5EF4-FFF2-40B4-BE49-F238E27FC236}">
+                <a16:creationId xmlns:a16="http://schemas.microsoft.com/office/drawing/2014/main" id="{9D498CBC-5DF2-3EA2-E0E7-DF1937EEC8EE}"/>
+              </a:ext>
+            </a:extLst>
+          </p:cNvPr>
+          <p:cNvPicPr>
+            <a:picLocks noChangeAspect="1"/>
+          </p:cNvPicPr>
+          <p:nvPr/>
+        </p:nvPicPr>
+        <p:blipFill>
+          <a:blip r:embed="rId4"/>
+          <a:stretch>
+            <a:fillRect/>
+          </a:stretch>
+        </p:blipFill>
+        <p:spPr>
+          <a:xfrm>
+            <a:off x="0" y="4312858"/>
+            <a:ext cx="4658375" cy="438211"/>
+          </a:xfrm>
+          <a:prstGeom prst="rect">
+            <a:avLst/>
+          </a:prstGeom>
+        </p:spPr>
+      </p:pic>
+    </p:spTree>
+    <p:extLst>
+      <p:ext uri="{BB962C8B-B14F-4D97-AF65-F5344CB8AC3E}">
+        <p14:creationId xmlns:p14="http://schemas.microsoft.com/office/powerpoint/2010/main" val="3076126049"/>
+      </p:ext>
+    </p:extLst>
+  </p:cSld>
+  <p:clrMapOvr>
+    <a:masterClrMapping/>
+  </p:clrMapOvr>
+</p:sld>
+</file>
+
+<file path=ppt/slides/slide11.xml><?xml version="1.0" encoding="utf-8"?>
+<p:sld xmlns:a="http://schemas.openxmlformats.org/drawingml/2006/main" xmlns:r="http://schemas.openxmlformats.org/officeDocument/2006/relationships" xmlns:p="http://schemas.openxmlformats.org/presentationml/2006/main">
+  <p:cSld>
+    <p:spTree>
+      <p:nvGrpSpPr>
+        <p:cNvPr id="1" name="">
+          <a:extLst>
+            <a:ext uri="{FF2B5EF4-FFF2-40B4-BE49-F238E27FC236}">
+              <a16:creationId xmlns:a16="http://schemas.microsoft.com/office/drawing/2014/main" id="{7ADAAC72-0B1A-0BFC-EAE0-5E60007FE893}"/>
+            </a:ext>
+          </a:extLst>
+        </p:cNvPr>
+        <p:cNvGrpSpPr/>
+        <p:nvPr/>
+      </p:nvGrpSpPr>
+      <p:grpSpPr>
+        <a:xfrm>
+          <a:off x="0" y="0"/>
+          <a:ext cx="0" cy="0"/>
+          <a:chOff x="0" y="0"/>
+          <a:chExt cx="0" cy="0"/>
+        </a:xfrm>
+      </p:grpSpPr>
+      <p:sp>
+        <p:nvSpPr>
+          <p:cNvPr id="3" name="TextBox 2">
+            <a:extLst>
+              <a:ext uri="{FF2B5EF4-FFF2-40B4-BE49-F238E27FC236}">
+                <a16:creationId xmlns:a16="http://schemas.microsoft.com/office/drawing/2014/main" id="{1768FF68-F2B3-44BF-E30A-B7F97750E37D}"/>
+              </a:ext>
+            </a:extLst>
+          </p:cNvPr>
+          <p:cNvSpPr txBox="1"/>
+          <p:nvPr/>
+        </p:nvSpPr>
+        <p:spPr>
+          <a:xfrm>
+            <a:off x="217714" y="255046"/>
+            <a:ext cx="11756571" cy="3656257"/>
+          </a:xfrm>
+          <a:prstGeom prst="rect">
+            <a:avLst/>
+          </a:prstGeom>
+          <a:noFill/>
+        </p:spPr>
+        <p:txBody>
+          <a:bodyPr wrap="square">
+            <a:spAutoFit/>
+          </a:bodyPr>
+          <a:lstStyle/>
+          <a:p>
+            <a:pPr>
+              <a:lnSpc>
+                <a:spcPct val="150000"/>
+              </a:lnSpc>
+              <a:buNone/>
+            </a:pPr>
+            <a:r>
+              <a:rPr lang="az-Latn-AZ" altLang="en-US" sz="1300">
+                <a:latin typeface="Arial" panose="020B0604020202020204" pitchFamily="34" charset="0"/>
+              </a:rPr>
+              <a:t>İndi isə həm t</a:t>
+            </a:r>
+            <a:r>
+              <a:rPr lang="en-US" altLang="en-US" sz="1300" b="1">
+                <a:latin typeface="Arial" panose="020B0604020202020204" pitchFamily="34" charset="0"/>
+              </a:rPr>
+              <a:t>əhlükəsiz HTML </a:t>
+            </a:r>
+            <a:r>
+              <a:rPr lang="en-US" altLang="en-US" sz="1300">
+                <a:latin typeface="Arial" panose="020B0604020202020204" pitchFamily="34" charset="0"/>
+              </a:rPr>
+              <a:t>+ </a:t>
+            </a:r>
+            <a:r>
+              <a:rPr lang="en-US" altLang="en-US" sz="1300" b="1">
+                <a:latin typeface="Arial" panose="020B0604020202020204" pitchFamily="34" charset="0"/>
+              </a:rPr>
+              <a:t>multi-line dəstək </a:t>
+            </a:r>
+            <a:r>
+              <a:rPr lang="en-US" altLang="en-US" sz="1300">
+                <a:latin typeface="Arial" panose="020B0604020202020204" pitchFamily="34" charset="0"/>
+              </a:rPr>
+              <a:t>+ </a:t>
+            </a:r>
+            <a:r>
+              <a:rPr lang="en-US" altLang="en-US" sz="1300" b="1">
+                <a:latin typeface="Arial" panose="020B0604020202020204" pitchFamily="34" charset="0"/>
+              </a:rPr>
+              <a:t>Markdown</a:t>
+            </a:r>
+            <a:r>
+              <a:rPr lang="en-US" altLang="en-US" sz="1300">
+                <a:latin typeface="Arial" panose="020B0604020202020204" pitchFamily="34" charset="0"/>
+              </a:rPr>
+              <a:t> dəstəyi olan peşəkar versiyanı </a:t>
+            </a:r>
+            <a:r>
+              <a:rPr lang="az-Latn-AZ" altLang="en-US" sz="1300">
+                <a:latin typeface="Arial" panose="020B0604020202020204" pitchFamily="34" charset="0"/>
+              </a:rPr>
+              <a:t>necə yazmaq olar ona baxaq</a:t>
+            </a:r>
+            <a:r>
+              <a:rPr lang="en-US" altLang="en-US" sz="1300">
+                <a:latin typeface="Arial" panose="020B0604020202020204" pitchFamily="34" charset="0"/>
+              </a:rPr>
+              <a:t>. Bu üsulla Blade-də </a:t>
+            </a:r>
+            <a:r>
+              <a:rPr lang="en-US" altLang="en-US" sz="1300" b="1">
+                <a:latin typeface="Arial" panose="020B0604020202020204" pitchFamily="34" charset="0"/>
+              </a:rPr>
+              <a:t>@safe() </a:t>
+            </a:r>
+            <a:r>
+              <a:rPr lang="en-US" altLang="en-US" sz="1300">
+                <a:latin typeface="Arial" panose="020B0604020202020204" pitchFamily="34" charset="0"/>
+              </a:rPr>
+              <a:t>yazanda həm HTML təhlükəsiz olacaq, həm də Markdown formatını (bold, italic, list və s.) işlədə biləcə</a:t>
+            </a:r>
+            <a:r>
+              <a:rPr lang="az-Latn-AZ" altLang="en-US" sz="1300">
+                <a:latin typeface="Arial" panose="020B0604020202020204" pitchFamily="34" charset="0"/>
+              </a:rPr>
+              <a:t>yik</a:t>
+            </a:r>
+            <a:r>
+              <a:rPr lang="en-US" altLang="en-US" sz="1300">
+                <a:latin typeface="Arial" panose="020B0604020202020204" pitchFamily="34" charset="0"/>
+              </a:rPr>
+              <a:t>.</a:t>
+            </a:r>
+            <a:endParaRPr lang="az-Latn-AZ" altLang="en-US" sz="1300">
+              <a:latin typeface="Arial" panose="020B0604020202020204" pitchFamily="34" charset="0"/>
+            </a:endParaRPr>
+          </a:p>
+          <a:p>
+            <a:pPr>
+              <a:lnSpc>
+                <a:spcPct val="150000"/>
+              </a:lnSpc>
+              <a:buNone/>
+            </a:pPr>
+            <a:endParaRPr kumimoji="0" lang="az-Latn-AZ" altLang="en-US" sz="1300" b="0" i="0" u="none" strike="noStrike" cap="none" normalizeH="0" baseline="0">
+              <a:ln>
+                <a:noFill/>
+              </a:ln>
+              <a:solidFill>
+                <a:schemeClr val="tx1"/>
+              </a:solidFill>
+              <a:effectLst/>
+              <a:latin typeface="Arial" panose="020B0604020202020204" pitchFamily="34" charset="0"/>
+            </a:endParaRPr>
+          </a:p>
+          <a:p>
+            <a:pPr>
+              <a:lnSpc>
+                <a:spcPct val="150000"/>
+              </a:lnSpc>
+              <a:buNone/>
+            </a:pPr>
+            <a:endParaRPr lang="az-Latn-AZ" altLang="en-US" sz="1300">
+              <a:latin typeface="Arial" panose="020B0604020202020204" pitchFamily="34" charset="0"/>
+            </a:endParaRPr>
+          </a:p>
+          <a:p>
+            <a:pPr>
+              <a:lnSpc>
+                <a:spcPct val="150000"/>
+              </a:lnSpc>
+              <a:buNone/>
+            </a:pPr>
+            <a:r>
+              <a:rPr kumimoji="0" lang="az-Latn-AZ" altLang="en-US" sz="1300" b="0" i="0" u="none" strike="noStrike" cap="none" normalizeH="0" baseline="0">
+                <a:ln>
+                  <a:noFill/>
+                </a:ln>
+                <a:solidFill>
+                  <a:schemeClr val="tx1"/>
+                </a:solidFill>
+                <a:effectLst/>
+                <a:latin typeface="Arial" panose="020B0604020202020204" pitchFamily="34" charset="0"/>
+              </a:rPr>
+              <a:t>Bunun üçün ilk olaraq</a:t>
+            </a:r>
+            <a:r>
+              <a:rPr lang="az-Latn-AZ" altLang="en-US" sz="1300">
+                <a:latin typeface="Arial" panose="020B0604020202020204" pitchFamily="34" charset="0"/>
+              </a:rPr>
+              <a:t>, </a:t>
+            </a:r>
+            <a:r>
+              <a:rPr lang="az-Latn-AZ" altLang="en-US" sz="1300" b="1">
+                <a:latin typeface="Arial" panose="020B0604020202020204" pitchFamily="34" charset="0"/>
+              </a:rPr>
+              <a:t>Composer</a:t>
+            </a:r>
+            <a:r>
+              <a:rPr lang="az-Latn-AZ" altLang="en-US" sz="1300">
+                <a:latin typeface="Arial" panose="020B0604020202020204" pitchFamily="34" charset="0"/>
+              </a:rPr>
+              <a:t> ilə </a:t>
+            </a:r>
+            <a:r>
+              <a:rPr lang="az-Latn-AZ" altLang="en-US" sz="1300" b="1">
+                <a:latin typeface="Arial" panose="020B0604020202020204" pitchFamily="34" charset="0"/>
+              </a:rPr>
+              <a:t>Markdown parser </a:t>
+            </a:r>
+            <a:r>
+              <a:rPr lang="az-Latn-AZ" altLang="en-US" sz="1300">
+                <a:latin typeface="Arial" panose="020B0604020202020204" pitchFamily="34" charset="0"/>
+              </a:rPr>
+              <a:t>quraşdırmaq lazımdır.  Biz </a:t>
+            </a:r>
+            <a:r>
+              <a:rPr lang="az-Latn-AZ" altLang="en-US" sz="1300" b="1">
+                <a:latin typeface="Arial" panose="020B0604020202020204" pitchFamily="34" charset="0"/>
+              </a:rPr>
+              <a:t>league/commonmark </a:t>
+            </a:r>
+            <a:r>
+              <a:rPr lang="az-Latn-AZ" altLang="en-US" sz="1300">
+                <a:latin typeface="Arial" panose="020B0604020202020204" pitchFamily="34" charset="0"/>
+              </a:rPr>
+              <a:t>kitabxanasından istifadə edəcəyik. </a:t>
+            </a:r>
+            <a:r>
+              <a:rPr lang="az-Latn-AZ" altLang="en-US" sz="1300" b="1">
+                <a:latin typeface="Arial" panose="020B0604020202020204" pitchFamily="34" charset="0"/>
+              </a:rPr>
+              <a:t>Terminalda</a:t>
+            </a:r>
+            <a:r>
+              <a:rPr lang="az-Latn-AZ" altLang="en-US" sz="1300">
+                <a:latin typeface="Arial" panose="020B0604020202020204" pitchFamily="34" charset="0"/>
+              </a:rPr>
+              <a:t>:</a:t>
+            </a:r>
+          </a:p>
+          <a:p>
+            <a:pPr>
+              <a:lnSpc>
+                <a:spcPct val="150000"/>
+              </a:lnSpc>
+              <a:buNone/>
+            </a:pPr>
+            <a:endParaRPr kumimoji="0" lang="az-Latn-AZ" altLang="en-US" sz="1300" b="0" i="0" u="none" strike="noStrike" cap="none" normalizeH="0" baseline="0">
+              <a:ln>
+                <a:noFill/>
+              </a:ln>
+              <a:solidFill>
+                <a:schemeClr val="tx1"/>
+              </a:solidFill>
+              <a:effectLst/>
+              <a:latin typeface="Arial" panose="020B0604020202020204" pitchFamily="34" charset="0"/>
+            </a:endParaRPr>
+          </a:p>
+          <a:p>
+            <a:pPr>
+              <a:lnSpc>
+                <a:spcPct val="150000"/>
+              </a:lnSpc>
+              <a:buNone/>
+            </a:pPr>
+            <a:endParaRPr lang="az-Latn-AZ" altLang="en-US" sz="1300">
+              <a:latin typeface="Arial" panose="020B0604020202020204" pitchFamily="34" charset="0"/>
+            </a:endParaRPr>
+          </a:p>
+          <a:p>
+            <a:pPr>
+              <a:lnSpc>
+                <a:spcPct val="150000"/>
+              </a:lnSpc>
+              <a:buNone/>
+            </a:pPr>
+            <a:endParaRPr kumimoji="0" lang="az-Latn-AZ" altLang="en-US" sz="1300" b="0" i="0" u="none" strike="noStrike" cap="none" normalizeH="0" baseline="0">
+              <a:ln>
+                <a:noFill/>
+              </a:ln>
+              <a:solidFill>
+                <a:schemeClr val="tx1"/>
+              </a:solidFill>
+              <a:effectLst/>
+              <a:latin typeface="Arial" panose="020B0604020202020204" pitchFamily="34" charset="0"/>
+            </a:endParaRPr>
+          </a:p>
+          <a:p>
+            <a:pPr>
+              <a:lnSpc>
+                <a:spcPct val="150000"/>
+              </a:lnSpc>
+              <a:buNone/>
+            </a:pPr>
+            <a:endParaRPr lang="az-Latn-AZ" altLang="en-US" sz="1300">
+              <a:latin typeface="Arial" panose="020B0604020202020204" pitchFamily="34" charset="0"/>
+            </a:endParaRPr>
+          </a:p>
+          <a:p>
+            <a:pPr>
+              <a:lnSpc>
+                <a:spcPct val="150000"/>
+              </a:lnSpc>
+              <a:buNone/>
+            </a:pPr>
+            <a:r>
+              <a:rPr lang="en-US" altLang="en-US" sz="1300">
+                <a:latin typeface="Arial" panose="020B0604020202020204" pitchFamily="34" charset="0"/>
+              </a:rPr>
+              <a:t>AppServiceProvider-də directive yarat</a:t>
+            </a:r>
+            <a:r>
+              <a:rPr lang="az-Latn-AZ" altLang="en-US" sz="1300">
+                <a:latin typeface="Arial" panose="020B0604020202020204" pitchFamily="34" charset="0"/>
+              </a:rPr>
+              <a:t>: </a:t>
+            </a:r>
+            <a:r>
+              <a:rPr lang="en-US" altLang="en-US" sz="1300">
+                <a:latin typeface="Arial" panose="020B0604020202020204" pitchFamily="34" charset="0"/>
+              </a:rPr>
+              <a:t> </a:t>
+            </a:r>
+            <a:r>
+              <a:rPr lang="en-US" altLang="en-US" sz="1300" b="1">
+                <a:latin typeface="Arial" panose="020B0604020202020204" pitchFamily="34" charset="0"/>
+              </a:rPr>
+              <a:t>app/Providers/AppServiceProvider.php</a:t>
+            </a:r>
+            <a:endParaRPr lang="az-Latn-AZ" altLang="en-US" sz="1300" b="1">
+              <a:latin typeface="Arial" panose="020B0604020202020204" pitchFamily="34" charset="0"/>
+            </a:endParaRPr>
+          </a:p>
+          <a:p>
+            <a:pPr>
+              <a:lnSpc>
+                <a:spcPct val="150000"/>
+              </a:lnSpc>
+              <a:buNone/>
+            </a:pPr>
+            <a:endParaRPr kumimoji="0" lang="az-Latn-AZ" altLang="en-US" sz="1300" b="0" i="0" u="none" strike="noStrike" cap="none" normalizeH="0" baseline="0">
+              <a:ln>
+                <a:noFill/>
+              </a:ln>
+              <a:solidFill>
+                <a:schemeClr val="tx1"/>
+              </a:solidFill>
+              <a:effectLst/>
+              <a:latin typeface="Arial" panose="020B0604020202020204" pitchFamily="34" charset="0"/>
+            </a:endParaRPr>
+          </a:p>
+          <a:p>
+            <a:pPr>
+              <a:lnSpc>
+                <a:spcPct val="150000"/>
+              </a:lnSpc>
+              <a:buNone/>
+            </a:pPr>
+            <a:endParaRPr kumimoji="0" lang="en-US" altLang="en-US" sz="1300" b="0" i="0" u="none" strike="noStrike" cap="none" normalizeH="0" baseline="0">
+              <a:ln>
+                <a:noFill/>
+              </a:ln>
+              <a:solidFill>
+                <a:schemeClr val="tx1"/>
+              </a:solidFill>
+              <a:effectLst/>
+              <a:latin typeface="Arial" panose="020B0604020202020204" pitchFamily="34" charset="0"/>
+            </a:endParaRPr>
+          </a:p>
+        </p:txBody>
+      </p:sp>
+      <p:pic>
+        <p:nvPicPr>
+          <p:cNvPr id="4" name="Picture 3">
+            <a:extLst>
+              <a:ext uri="{FF2B5EF4-FFF2-40B4-BE49-F238E27FC236}">
+                <a16:creationId xmlns:a16="http://schemas.microsoft.com/office/drawing/2014/main" id="{E9CE48EB-4510-7A13-3C46-A06EB013F8CF}"/>
+              </a:ext>
+            </a:extLst>
+          </p:cNvPr>
+          <p:cNvPicPr>
+            <a:picLocks noChangeAspect="1"/>
+          </p:cNvPicPr>
+          <p:nvPr/>
+        </p:nvPicPr>
+        <p:blipFill>
+          <a:blip r:embed="rId2"/>
+          <a:stretch>
+            <a:fillRect/>
+          </a:stretch>
+        </p:blipFill>
+        <p:spPr>
+          <a:xfrm>
+            <a:off x="0" y="1949855"/>
+            <a:ext cx="2781688" cy="390580"/>
+          </a:xfrm>
+          <a:prstGeom prst="rect">
+            <a:avLst/>
+          </a:prstGeom>
+        </p:spPr>
+      </p:pic>
+      <p:pic>
+        <p:nvPicPr>
+          <p:cNvPr id="6" name="Picture 5">
+            <a:extLst>
+              <a:ext uri="{FF2B5EF4-FFF2-40B4-BE49-F238E27FC236}">
+                <a16:creationId xmlns:a16="http://schemas.microsoft.com/office/drawing/2014/main" id="{BB9B8E3F-0761-8FD8-998C-755AE7A765E0}"/>
+              </a:ext>
+            </a:extLst>
+          </p:cNvPr>
+          <p:cNvPicPr>
+            <a:picLocks noChangeAspect="1"/>
+          </p:cNvPicPr>
+          <p:nvPr/>
+        </p:nvPicPr>
+        <p:blipFill>
+          <a:blip r:embed="rId3"/>
+          <a:stretch>
+            <a:fillRect/>
+          </a:stretch>
+        </p:blipFill>
+        <p:spPr>
+          <a:xfrm>
+            <a:off x="0" y="3535248"/>
+            <a:ext cx="5098473" cy="3322752"/>
+          </a:xfrm>
+          <a:prstGeom prst="rect">
+            <a:avLst/>
+          </a:prstGeom>
+        </p:spPr>
+      </p:pic>
+    </p:spTree>
+    <p:extLst>
+      <p:ext uri="{BB962C8B-B14F-4D97-AF65-F5344CB8AC3E}">
+        <p14:creationId xmlns:p14="http://schemas.microsoft.com/office/powerpoint/2010/main" val="2479454953"/>
+      </p:ext>
+    </p:extLst>
+  </p:cSld>
+  <p:clrMapOvr>
+    <a:masterClrMapping/>
+  </p:clrMapOvr>
+</p:sld>
+</file>
+
+<file path=ppt/slides/slide12.xml><?xml version="1.0" encoding="utf-8"?>
+<p:sld xmlns:a="http://schemas.openxmlformats.org/drawingml/2006/main" xmlns:r="http://schemas.openxmlformats.org/officeDocument/2006/relationships" xmlns:p="http://schemas.openxmlformats.org/presentationml/2006/main">
+  <p:cSld>
+    <p:spTree>
+      <p:nvGrpSpPr>
+        <p:cNvPr id="1" name="">
+          <a:extLst>
+            <a:ext uri="{FF2B5EF4-FFF2-40B4-BE49-F238E27FC236}">
+              <a16:creationId xmlns:a16="http://schemas.microsoft.com/office/drawing/2014/main" id="{0668CCFE-126C-D9A9-0D7D-C6E23571AC29}"/>
+            </a:ext>
+          </a:extLst>
+        </p:cNvPr>
+        <p:cNvGrpSpPr/>
+        <p:nvPr/>
+      </p:nvGrpSpPr>
+      <p:grpSpPr>
+        <a:xfrm>
+          <a:off x="0" y="0"/>
+          <a:ext cx="0" cy="0"/>
+          <a:chOff x="0" y="0"/>
+          <a:chExt cx="0" cy="0"/>
+        </a:xfrm>
+      </p:grpSpPr>
+      <p:sp>
+        <p:nvSpPr>
+          <p:cNvPr id="3" name="TextBox 2">
+            <a:extLst>
+              <a:ext uri="{FF2B5EF4-FFF2-40B4-BE49-F238E27FC236}">
+                <a16:creationId xmlns:a16="http://schemas.microsoft.com/office/drawing/2014/main" id="{5D4D8018-8EC0-5E5B-7EE9-8D53AFBBFD1A}"/>
+              </a:ext>
+            </a:extLst>
+          </p:cNvPr>
+          <p:cNvSpPr txBox="1"/>
+          <p:nvPr/>
+        </p:nvSpPr>
+        <p:spPr>
+          <a:xfrm>
+            <a:off x="217714" y="255046"/>
+            <a:ext cx="11756571" cy="4256422"/>
+          </a:xfrm>
+          <a:prstGeom prst="rect">
+            <a:avLst/>
+          </a:prstGeom>
+          <a:noFill/>
+        </p:spPr>
+        <p:txBody>
+          <a:bodyPr wrap="square">
+            <a:spAutoFit/>
+          </a:bodyPr>
+          <a:lstStyle/>
+          <a:p>
+            <a:pPr>
+              <a:lnSpc>
+                <a:spcPct val="150000"/>
+              </a:lnSpc>
+              <a:buNone/>
+            </a:pPr>
+            <a:r>
+              <a:rPr lang="en-US" altLang="en-US" sz="1300">
+                <a:latin typeface="Arial" panose="020B0604020202020204" pitchFamily="34" charset="0"/>
+              </a:rPr>
+              <a:t>Blade-də istifadə</a:t>
+            </a:r>
+            <a:r>
+              <a:rPr lang="az-Latn-AZ" altLang="en-US" sz="1300">
+                <a:latin typeface="Arial" panose="020B0604020202020204" pitchFamily="34" charset="0"/>
+              </a:rPr>
+              <a:t>:</a:t>
+            </a:r>
+          </a:p>
+          <a:p>
+            <a:pPr>
+              <a:lnSpc>
+                <a:spcPct val="150000"/>
+              </a:lnSpc>
+              <a:buNone/>
+            </a:pPr>
+            <a:endParaRPr kumimoji="0" lang="az-Latn-AZ" altLang="en-US" sz="1300" b="0" i="0" u="none" strike="noStrike" cap="none" normalizeH="0" baseline="0">
+              <a:ln>
+                <a:noFill/>
+              </a:ln>
+              <a:solidFill>
+                <a:schemeClr val="tx1"/>
+              </a:solidFill>
+              <a:effectLst/>
+              <a:latin typeface="Arial" panose="020B0604020202020204" pitchFamily="34" charset="0"/>
+            </a:endParaRPr>
+          </a:p>
+          <a:p>
+            <a:pPr>
+              <a:lnSpc>
+                <a:spcPct val="150000"/>
+              </a:lnSpc>
+              <a:buNone/>
+            </a:pPr>
+            <a:endParaRPr lang="az-Latn-AZ" altLang="en-US" sz="1300">
+              <a:latin typeface="Arial" panose="020B0604020202020204" pitchFamily="34" charset="0"/>
+            </a:endParaRPr>
+          </a:p>
+          <a:p>
+            <a:pPr>
+              <a:lnSpc>
+                <a:spcPct val="150000"/>
+              </a:lnSpc>
+              <a:buNone/>
+            </a:pPr>
+            <a:endParaRPr kumimoji="0" lang="az-Latn-AZ" altLang="en-US" sz="1300" b="0" i="0" u="none" strike="noStrike" cap="none" normalizeH="0" baseline="0">
+              <a:ln>
+                <a:noFill/>
+              </a:ln>
+              <a:solidFill>
+                <a:schemeClr val="tx1"/>
+              </a:solidFill>
+              <a:effectLst/>
+              <a:latin typeface="Arial" panose="020B0604020202020204" pitchFamily="34" charset="0"/>
+            </a:endParaRPr>
+          </a:p>
+          <a:p>
+            <a:pPr>
+              <a:lnSpc>
+                <a:spcPct val="150000"/>
+              </a:lnSpc>
+              <a:buNone/>
+            </a:pPr>
+            <a:endParaRPr lang="az-Latn-AZ" altLang="en-US" sz="1300">
+              <a:latin typeface="Arial" panose="020B0604020202020204" pitchFamily="34" charset="0"/>
+            </a:endParaRPr>
+          </a:p>
+          <a:p>
+            <a:pPr>
+              <a:lnSpc>
+                <a:spcPct val="150000"/>
+              </a:lnSpc>
+              <a:buNone/>
+            </a:pPr>
+            <a:r>
+              <a:rPr lang="en-US" altLang="en-US" sz="1300">
+                <a:latin typeface="Arial" panose="020B0604020202020204" pitchFamily="34" charset="0"/>
+              </a:rPr>
+              <a:t>Necə işləyir? </a:t>
+            </a:r>
+            <a:r>
+              <a:rPr lang="en-US" altLang="en-US" sz="1300" b="1">
+                <a:latin typeface="Arial" panose="020B0604020202020204" pitchFamily="34" charset="0"/>
+              </a:rPr>
+              <a:t>Əgər DB-də</a:t>
+            </a:r>
+            <a:r>
+              <a:rPr lang="en-US" altLang="en-US" sz="1300">
+                <a:latin typeface="Arial" panose="020B0604020202020204" pitchFamily="34" charset="0"/>
+              </a:rPr>
+              <a:t>:</a:t>
+            </a:r>
+            <a:endParaRPr lang="az-Latn-AZ" altLang="en-US" sz="1300">
+              <a:latin typeface="Arial" panose="020B0604020202020204" pitchFamily="34" charset="0"/>
+            </a:endParaRPr>
+          </a:p>
+          <a:p>
+            <a:pPr>
+              <a:lnSpc>
+                <a:spcPct val="150000"/>
+              </a:lnSpc>
+              <a:buNone/>
+            </a:pPr>
+            <a:endParaRPr kumimoji="0" lang="az-Latn-AZ" altLang="en-US" sz="1300" b="0" i="0" u="none" strike="noStrike" cap="none" normalizeH="0" baseline="0">
+              <a:ln>
+                <a:noFill/>
+              </a:ln>
+              <a:solidFill>
+                <a:schemeClr val="tx1"/>
+              </a:solidFill>
+              <a:effectLst/>
+              <a:latin typeface="Arial" panose="020B0604020202020204" pitchFamily="34" charset="0"/>
+            </a:endParaRPr>
+          </a:p>
+          <a:p>
+            <a:pPr>
+              <a:lnSpc>
+                <a:spcPct val="150000"/>
+              </a:lnSpc>
+              <a:buNone/>
+            </a:pPr>
+            <a:endParaRPr lang="az-Latn-AZ" altLang="en-US" sz="1300">
+              <a:latin typeface="Arial" panose="020B0604020202020204" pitchFamily="34" charset="0"/>
+            </a:endParaRPr>
+          </a:p>
+          <a:p>
+            <a:pPr>
+              <a:lnSpc>
+                <a:spcPct val="150000"/>
+              </a:lnSpc>
+              <a:buNone/>
+            </a:pPr>
+            <a:endParaRPr kumimoji="0" lang="az-Latn-AZ" altLang="en-US" sz="1300" b="0" i="0" u="none" strike="noStrike" cap="none" normalizeH="0" baseline="0">
+              <a:ln>
+                <a:noFill/>
+              </a:ln>
+              <a:solidFill>
+                <a:schemeClr val="tx1"/>
+              </a:solidFill>
+              <a:effectLst/>
+              <a:latin typeface="Arial" panose="020B0604020202020204" pitchFamily="34" charset="0"/>
+            </a:endParaRPr>
+          </a:p>
+          <a:p>
+            <a:pPr>
+              <a:lnSpc>
+                <a:spcPct val="150000"/>
+              </a:lnSpc>
+              <a:buNone/>
+            </a:pPr>
+            <a:endParaRPr lang="az-Latn-AZ" altLang="en-US" sz="1300">
+              <a:latin typeface="Arial" panose="020B0604020202020204" pitchFamily="34" charset="0"/>
+            </a:endParaRPr>
+          </a:p>
+          <a:p>
+            <a:pPr>
+              <a:lnSpc>
+                <a:spcPct val="150000"/>
+              </a:lnSpc>
+              <a:buNone/>
+            </a:pPr>
+            <a:endParaRPr kumimoji="0" lang="az-Latn-AZ" altLang="en-US" sz="1300" b="0" i="0" u="none" strike="noStrike" cap="none" normalizeH="0" baseline="0">
+              <a:ln>
+                <a:noFill/>
+              </a:ln>
+              <a:solidFill>
+                <a:schemeClr val="tx1"/>
+              </a:solidFill>
+              <a:effectLst/>
+              <a:latin typeface="Arial" panose="020B0604020202020204" pitchFamily="34" charset="0"/>
+            </a:endParaRPr>
+          </a:p>
+          <a:p>
+            <a:pPr>
+              <a:lnSpc>
+                <a:spcPct val="150000"/>
+              </a:lnSpc>
+              <a:buNone/>
+            </a:pPr>
+            <a:endParaRPr lang="az-Latn-AZ" altLang="en-US" sz="1300">
+              <a:latin typeface="Arial" panose="020B0604020202020204" pitchFamily="34" charset="0"/>
+            </a:endParaRPr>
+          </a:p>
+          <a:p>
+            <a:pPr>
+              <a:lnSpc>
+                <a:spcPct val="150000"/>
+              </a:lnSpc>
+              <a:buNone/>
+            </a:pPr>
+            <a:endParaRPr kumimoji="0" lang="az-Latn-AZ" altLang="en-US" sz="1300" b="0" i="0" u="none" strike="noStrike" cap="none" normalizeH="0" baseline="0">
+              <a:ln>
+                <a:noFill/>
+              </a:ln>
+              <a:solidFill>
+                <a:schemeClr val="tx1"/>
+              </a:solidFill>
+              <a:effectLst/>
+              <a:latin typeface="Arial" panose="020B0604020202020204" pitchFamily="34" charset="0"/>
+            </a:endParaRPr>
+          </a:p>
+          <a:p>
+            <a:pPr>
+              <a:lnSpc>
+                <a:spcPct val="150000"/>
+              </a:lnSpc>
+              <a:buNone/>
+            </a:pPr>
+            <a:r>
+              <a:rPr lang="en-US" altLang="en-US" sz="1300">
+                <a:latin typeface="Arial" panose="020B0604020202020204" pitchFamily="34" charset="0"/>
+              </a:rPr>
+              <a:t>Çıxış</a:t>
+            </a:r>
+            <a:r>
+              <a:rPr lang="az-Latn-AZ" altLang="en-US" sz="1300">
+                <a:latin typeface="Arial" panose="020B0604020202020204" pitchFamily="34" charset="0"/>
+              </a:rPr>
+              <a:t> da</a:t>
+            </a:r>
+            <a:r>
+              <a:rPr lang="en-US" altLang="en-US" sz="1300">
+                <a:latin typeface="Arial" panose="020B0604020202020204" pitchFamily="34" charset="0"/>
+              </a:rPr>
+              <a:t>:</a:t>
+            </a:r>
+            <a:r>
+              <a:rPr lang="az-Latn-AZ" altLang="en-US" sz="1300">
+                <a:latin typeface="Arial" panose="020B0604020202020204" pitchFamily="34" charset="0"/>
+              </a:rPr>
+              <a:t> &lt;script&gt; avtomatik silinir, Markdown isə HTML-ə çevrilir.</a:t>
+            </a:r>
+            <a:endParaRPr kumimoji="0" lang="en-US" altLang="en-US" sz="1300" b="0" i="0" u="none" strike="noStrike" cap="none" normalizeH="0" baseline="0">
+              <a:ln>
+                <a:noFill/>
+              </a:ln>
+              <a:solidFill>
+                <a:schemeClr val="tx1"/>
+              </a:solidFill>
+              <a:effectLst/>
+              <a:latin typeface="Arial" panose="020B0604020202020204" pitchFamily="34" charset="0"/>
+            </a:endParaRPr>
+          </a:p>
+        </p:txBody>
+      </p:sp>
+      <p:pic>
+        <p:nvPicPr>
+          <p:cNvPr id="4" name="Picture 3">
+            <a:extLst>
+              <a:ext uri="{FF2B5EF4-FFF2-40B4-BE49-F238E27FC236}">
+                <a16:creationId xmlns:a16="http://schemas.microsoft.com/office/drawing/2014/main" id="{A27B14EE-116A-4909-87E3-333318D16FCB}"/>
+              </a:ext>
+            </a:extLst>
+          </p:cNvPr>
+          <p:cNvPicPr>
+            <a:picLocks noChangeAspect="1"/>
+          </p:cNvPicPr>
+          <p:nvPr/>
+        </p:nvPicPr>
+        <p:blipFill>
+          <a:blip r:embed="rId2"/>
+          <a:stretch>
+            <a:fillRect/>
+          </a:stretch>
+        </p:blipFill>
+        <p:spPr>
+          <a:xfrm>
+            <a:off x="0" y="724733"/>
+            <a:ext cx="2524477" cy="476316"/>
+          </a:xfrm>
+          <a:prstGeom prst="rect">
+            <a:avLst/>
+          </a:prstGeom>
+        </p:spPr>
+      </p:pic>
+      <p:pic>
+        <p:nvPicPr>
+          <p:cNvPr id="6" name="Picture 5">
+            <a:extLst>
+              <a:ext uri="{FF2B5EF4-FFF2-40B4-BE49-F238E27FC236}">
+                <a16:creationId xmlns:a16="http://schemas.microsoft.com/office/drawing/2014/main" id="{A1D4196F-D76C-C4C7-2671-F16F6667E533}"/>
+              </a:ext>
+            </a:extLst>
+          </p:cNvPr>
+          <p:cNvPicPr>
+            <a:picLocks noChangeAspect="1"/>
+          </p:cNvPicPr>
+          <p:nvPr/>
+        </p:nvPicPr>
+        <p:blipFill>
+          <a:blip r:embed="rId3"/>
+          <a:stretch>
+            <a:fillRect/>
+          </a:stretch>
+        </p:blipFill>
+        <p:spPr>
+          <a:xfrm>
+            <a:off x="0" y="2168537"/>
+            <a:ext cx="3924848" cy="1028844"/>
+          </a:xfrm>
+          <a:prstGeom prst="rect">
+            <a:avLst/>
+          </a:prstGeom>
+        </p:spPr>
+      </p:pic>
+      <p:pic>
+        <p:nvPicPr>
+          <p:cNvPr id="8" name="Picture 7">
+            <a:extLst>
+              <a:ext uri="{FF2B5EF4-FFF2-40B4-BE49-F238E27FC236}">
+                <a16:creationId xmlns:a16="http://schemas.microsoft.com/office/drawing/2014/main" id="{F1D6430F-1F61-44A5-41EA-2EB19D15F43B}"/>
+              </a:ext>
+            </a:extLst>
+          </p:cNvPr>
+          <p:cNvPicPr>
+            <a:picLocks noChangeAspect="1"/>
+          </p:cNvPicPr>
+          <p:nvPr/>
+        </p:nvPicPr>
+        <p:blipFill>
+          <a:blip r:embed="rId4"/>
+          <a:stretch>
+            <a:fillRect/>
+          </a:stretch>
+        </p:blipFill>
+        <p:spPr>
+          <a:xfrm>
+            <a:off x="0" y="4544111"/>
+            <a:ext cx="4563112" cy="1533739"/>
+          </a:xfrm>
+          <a:prstGeom prst="rect">
+            <a:avLst/>
+          </a:prstGeom>
+        </p:spPr>
+      </p:pic>
+      <p:sp>
+        <p:nvSpPr>
+          <p:cNvPr id="10" name="TextBox 9">
+            <a:extLst>
+              <a:ext uri="{FF2B5EF4-FFF2-40B4-BE49-F238E27FC236}">
+                <a16:creationId xmlns:a16="http://schemas.microsoft.com/office/drawing/2014/main" id="{7A152D6A-BC6E-4DC0-CF32-3E6D27E5A688}"/>
+              </a:ext>
+            </a:extLst>
+          </p:cNvPr>
+          <p:cNvSpPr txBox="1"/>
+          <p:nvPr/>
+        </p:nvSpPr>
+        <p:spPr>
+          <a:xfrm>
+            <a:off x="7628890" y="5103674"/>
+            <a:ext cx="4405746" cy="1754326"/>
+          </a:xfrm>
+          <a:prstGeom prst="rect">
+            <a:avLst/>
+          </a:prstGeom>
+          <a:noFill/>
+        </p:spPr>
+        <p:txBody>
+          <a:bodyPr wrap="square">
+            <a:spAutoFit/>
+          </a:bodyPr>
+          <a:lstStyle/>
+          <a:p>
+            <a:r>
+              <a:rPr lang="en-US" b="1"/>
+              <a:t>Üstünlükləri</a:t>
+            </a:r>
+            <a:r>
+              <a:rPr lang="az-Latn-AZ"/>
+              <a:t>:</a:t>
+            </a:r>
+          </a:p>
+          <a:p>
+            <a:endParaRPr lang="en-US"/>
+          </a:p>
+          <a:p>
+            <a:r>
+              <a:rPr lang="en-US"/>
+              <a:t>✅ XSS-dən qoruyur.</a:t>
+            </a:r>
+          </a:p>
+          <a:p>
+            <a:r>
+              <a:rPr lang="en-US"/>
+              <a:t>✅ HTML formatını saxlayır.</a:t>
+            </a:r>
+          </a:p>
+          <a:p>
+            <a:r>
+              <a:rPr lang="en-US"/>
+              <a:t>✅ Markdown yazı formasını dəstəkləyir.</a:t>
+            </a:r>
+          </a:p>
+          <a:p>
+            <a:r>
+              <a:rPr lang="en-US"/>
+              <a:t>✅ Multi-line mətni olduğu kimi qoruyur.</a:t>
+            </a:r>
+          </a:p>
+        </p:txBody>
+      </p:sp>
+    </p:spTree>
+    <p:extLst>
+      <p:ext uri="{BB962C8B-B14F-4D97-AF65-F5344CB8AC3E}">
+        <p14:creationId xmlns:p14="http://schemas.microsoft.com/office/powerpoint/2010/main" val="3670826320"/>
+      </p:ext>
+    </p:extLst>
+  </p:cSld>
+  <p:clrMapOvr>
+    <a:masterClrMapping/>
+  </p:clrMapOvr>
+</p:sld>
+</file>
+
+<file path=ppt/slides/slide13.xml><?xml version="1.0" encoding="utf-8"?>
+<p:sld xmlns:a="http://schemas.openxmlformats.org/drawingml/2006/main" xmlns:r="http://schemas.openxmlformats.org/officeDocument/2006/relationships" xmlns:p="http://schemas.openxmlformats.org/presentationml/2006/main">
+  <p:cSld>
+    <p:spTree>
+      <p:nvGrpSpPr>
+        <p:cNvPr id="1" name="">
+          <a:extLst>
+            <a:ext uri="{FF2B5EF4-FFF2-40B4-BE49-F238E27FC236}">
+              <a16:creationId xmlns:a16="http://schemas.microsoft.com/office/drawing/2014/main" id="{1DC572AB-4E30-C989-986E-A2C43C07C500}"/>
+            </a:ext>
+          </a:extLst>
+        </p:cNvPr>
+        <p:cNvGrpSpPr/>
+        <p:nvPr/>
+      </p:nvGrpSpPr>
+      <p:grpSpPr>
+        <a:xfrm>
+          <a:off x="0" y="0"/>
+          <a:ext cx="0" cy="0"/>
+          <a:chOff x="0" y="0"/>
+          <a:chExt cx="0" cy="0"/>
+        </a:xfrm>
+      </p:grpSpPr>
+      <p:sp>
+        <p:nvSpPr>
+          <p:cNvPr id="3" name="TextBox 2">
+            <a:extLst>
+              <a:ext uri="{FF2B5EF4-FFF2-40B4-BE49-F238E27FC236}">
+                <a16:creationId xmlns:a16="http://schemas.microsoft.com/office/drawing/2014/main" id="{7BD374F8-6702-3E8C-751D-2DED7F199DA6}"/>
+              </a:ext>
+            </a:extLst>
+          </p:cNvPr>
+          <p:cNvSpPr txBox="1"/>
+          <p:nvPr/>
+        </p:nvSpPr>
+        <p:spPr>
+          <a:xfrm>
+            <a:off x="217714" y="255046"/>
+            <a:ext cx="11756571" cy="3056093"/>
+          </a:xfrm>
+          <a:prstGeom prst="rect">
+            <a:avLst/>
+          </a:prstGeom>
+          <a:noFill/>
+        </p:spPr>
+        <p:txBody>
+          <a:bodyPr wrap="square">
+            <a:spAutoFit/>
+          </a:bodyPr>
+          <a:lstStyle/>
+          <a:p>
+            <a:pPr>
+              <a:lnSpc>
+                <a:spcPct val="150000"/>
+              </a:lnSpc>
+              <a:buNone/>
+            </a:pPr>
+            <a:r>
+              <a:rPr lang="en-US" altLang="en-US" sz="1300">
+                <a:latin typeface="Arial" panose="020B0604020202020204" pitchFamily="34" charset="0"/>
+              </a:rPr>
+              <a:t>İstəsə</a:t>
+            </a:r>
+            <a:r>
+              <a:rPr lang="az-Latn-AZ" altLang="en-US" sz="1300">
+                <a:latin typeface="Arial" panose="020B0604020202020204" pitchFamily="34" charset="0"/>
+              </a:rPr>
+              <a:t>z</a:t>
+            </a:r>
+            <a:r>
+              <a:rPr lang="en-US" altLang="en-US" sz="1300">
+                <a:latin typeface="Arial" panose="020B0604020202020204" pitchFamily="34" charset="0"/>
+              </a:rPr>
+              <a:t> bunun bir də qısaldılmış, sadəcə </a:t>
+            </a:r>
+            <a:r>
+              <a:rPr lang="en-US" altLang="en-US" sz="1300" b="1">
+                <a:latin typeface="Arial" panose="020B0604020202020204" pitchFamily="34" charset="0"/>
+              </a:rPr>
+              <a:t>safe_html() </a:t>
+            </a:r>
+            <a:r>
+              <a:rPr lang="en-US" altLang="en-US" sz="1300">
+                <a:latin typeface="Arial" panose="020B0604020202020204" pitchFamily="34" charset="0"/>
+              </a:rPr>
+              <a:t>helper funksiyası ilə işləyən versiyasını da yaza bilərəm ki, </a:t>
+            </a:r>
+            <a:r>
+              <a:rPr lang="en-US" altLang="en-US" sz="1300" b="1">
+                <a:latin typeface="Arial" panose="020B0604020202020204" pitchFamily="34" charset="0"/>
+              </a:rPr>
+              <a:t>directive</a:t>
+            </a:r>
+            <a:r>
+              <a:rPr lang="en-US" altLang="en-US" sz="1300">
+                <a:latin typeface="Arial" panose="020B0604020202020204" pitchFamily="34" charset="0"/>
+              </a:rPr>
+              <a:t>-dən əlavə </a:t>
+            </a:r>
+            <a:r>
+              <a:rPr lang="en-US" altLang="en-US" sz="1300" b="1">
+                <a:latin typeface="Arial" panose="020B0604020202020204" pitchFamily="34" charset="0"/>
+              </a:rPr>
+              <a:t>normal</a:t>
+            </a:r>
+            <a:r>
+              <a:rPr lang="en-US" altLang="en-US" sz="1300">
+                <a:latin typeface="Arial" panose="020B0604020202020204" pitchFamily="34" charset="0"/>
+              </a:rPr>
+              <a:t> PHP-də də istifadə edə biləsən. Bu halda həm controller, həm də Blade-də eyni funksiyanı çağırmaq mümkün olar.</a:t>
+            </a:r>
+            <a:r>
+              <a:rPr lang="az-Latn-AZ" altLang="en-US" sz="1300">
+                <a:latin typeface="Arial" panose="020B0604020202020204" pitchFamily="34" charset="0"/>
+              </a:rPr>
+              <a:t> </a:t>
+            </a:r>
+          </a:p>
+          <a:p>
+            <a:pPr>
+              <a:lnSpc>
+                <a:spcPct val="150000"/>
+              </a:lnSpc>
+              <a:buNone/>
+            </a:pPr>
+            <a:endParaRPr kumimoji="0" lang="az-Latn-AZ" altLang="en-US" sz="1300" b="0" i="0" u="none" strike="noStrike" cap="none" normalizeH="0" baseline="0">
+              <a:ln>
+                <a:noFill/>
+              </a:ln>
+              <a:solidFill>
+                <a:schemeClr val="tx1"/>
+              </a:solidFill>
+              <a:effectLst/>
+              <a:latin typeface="Arial" panose="020B0604020202020204" pitchFamily="34" charset="0"/>
+            </a:endParaRPr>
+          </a:p>
+          <a:p>
+            <a:pPr>
+              <a:lnSpc>
+                <a:spcPct val="150000"/>
+              </a:lnSpc>
+              <a:buNone/>
+            </a:pPr>
+            <a:r>
+              <a:rPr lang="en-US" altLang="en-US" sz="1300">
+                <a:latin typeface="Arial" panose="020B0604020202020204" pitchFamily="34" charset="0"/>
+              </a:rPr>
+              <a:t>Bu sayədə </a:t>
+            </a:r>
+            <a:r>
+              <a:rPr lang="en-US" altLang="en-US" sz="1300" b="1">
+                <a:latin typeface="Arial" panose="020B0604020202020204" pitchFamily="34" charset="0"/>
+              </a:rPr>
+              <a:t>@safe() </a:t>
+            </a:r>
+            <a:r>
+              <a:rPr lang="en-US" altLang="en-US" sz="1300">
+                <a:latin typeface="Arial" panose="020B0604020202020204" pitchFamily="34" charset="0"/>
+              </a:rPr>
+              <a:t>Blade-də, </a:t>
+            </a:r>
+            <a:r>
+              <a:rPr lang="en-US" altLang="en-US" sz="1300" b="1">
+                <a:latin typeface="Arial" panose="020B0604020202020204" pitchFamily="34" charset="0"/>
+              </a:rPr>
+              <a:t>safe_html() </a:t>
+            </a:r>
+            <a:r>
+              <a:rPr lang="en-US" altLang="en-US" sz="1300">
+                <a:latin typeface="Arial" panose="020B0604020202020204" pitchFamily="34" charset="0"/>
+              </a:rPr>
+              <a:t>isə controller, seeder, job və s. istənilən PHP kodunda işləyəcək.</a:t>
+            </a:r>
+            <a:endParaRPr lang="az-Latn-AZ" altLang="en-US" sz="1300">
+              <a:latin typeface="Arial" panose="020B0604020202020204" pitchFamily="34" charset="0"/>
+            </a:endParaRPr>
+          </a:p>
+          <a:p>
+            <a:pPr>
+              <a:lnSpc>
+                <a:spcPct val="150000"/>
+              </a:lnSpc>
+              <a:buNone/>
+            </a:pPr>
+            <a:endParaRPr kumimoji="0" lang="az-Latn-AZ" altLang="en-US" sz="1300" b="0" i="0" u="none" strike="noStrike" cap="none" normalizeH="0" baseline="0">
+              <a:ln>
+                <a:noFill/>
+              </a:ln>
+              <a:solidFill>
+                <a:schemeClr val="tx1"/>
+              </a:solidFill>
+              <a:effectLst/>
+              <a:latin typeface="Arial" panose="020B0604020202020204" pitchFamily="34" charset="0"/>
+            </a:endParaRPr>
+          </a:p>
+          <a:p>
+            <a:pPr>
+              <a:lnSpc>
+                <a:spcPct val="150000"/>
+              </a:lnSpc>
+              <a:buNone/>
+            </a:pPr>
+            <a:r>
+              <a:rPr lang="nb-NO" altLang="en-US" sz="1300">
+                <a:latin typeface="Arial" panose="020B0604020202020204" pitchFamily="34" charset="0"/>
+              </a:rPr>
+              <a:t>Helper faylı yarat</a:t>
+            </a:r>
+            <a:r>
+              <a:rPr lang="az-Latn-AZ" altLang="en-US" sz="1300">
+                <a:latin typeface="Arial" panose="020B0604020202020204" pitchFamily="34" charset="0"/>
+              </a:rPr>
+              <a:t>: </a:t>
+            </a:r>
+            <a:r>
+              <a:rPr lang="nb-NO" altLang="en-US" sz="1300">
+                <a:latin typeface="Arial" panose="020B0604020202020204" pitchFamily="34" charset="0"/>
+              </a:rPr>
+              <a:t> </a:t>
+            </a:r>
+            <a:r>
+              <a:rPr lang="nb-NO" altLang="en-US" sz="1300" b="1">
+                <a:latin typeface="Arial" panose="020B0604020202020204" pitchFamily="34" charset="0"/>
+              </a:rPr>
+              <a:t>app/helpers.php</a:t>
+            </a:r>
+            <a:endParaRPr lang="az-Latn-AZ" altLang="en-US" sz="1300" b="1">
+              <a:latin typeface="Arial" panose="020B0604020202020204" pitchFamily="34" charset="0"/>
+            </a:endParaRPr>
+          </a:p>
+          <a:p>
+            <a:pPr>
+              <a:lnSpc>
+                <a:spcPct val="150000"/>
+              </a:lnSpc>
+              <a:buNone/>
+            </a:pPr>
+            <a:endParaRPr kumimoji="0" lang="az-Latn-AZ" altLang="en-US" sz="1300" b="0" i="0" u="none" strike="noStrike" cap="none" normalizeH="0" baseline="0">
+              <a:ln>
+                <a:noFill/>
+              </a:ln>
+              <a:solidFill>
+                <a:schemeClr val="tx1"/>
+              </a:solidFill>
+              <a:effectLst/>
+              <a:latin typeface="Arial" panose="020B0604020202020204" pitchFamily="34" charset="0"/>
+            </a:endParaRPr>
+          </a:p>
+          <a:p>
+            <a:pPr>
+              <a:lnSpc>
+                <a:spcPct val="150000"/>
+              </a:lnSpc>
+              <a:buNone/>
+            </a:pPr>
+            <a:endParaRPr lang="az-Latn-AZ" altLang="en-US" sz="1300">
+              <a:latin typeface="Arial" panose="020B0604020202020204" pitchFamily="34" charset="0"/>
+            </a:endParaRPr>
+          </a:p>
+          <a:p>
+            <a:pPr>
+              <a:lnSpc>
+                <a:spcPct val="150000"/>
+              </a:lnSpc>
+              <a:buNone/>
+            </a:pPr>
+            <a:endParaRPr kumimoji="0" lang="az-Latn-AZ" altLang="en-US" sz="1300" b="0" i="0" u="none" strike="noStrike" cap="none" normalizeH="0" baseline="0">
+              <a:ln>
+                <a:noFill/>
+              </a:ln>
+              <a:solidFill>
+                <a:schemeClr val="tx1"/>
+              </a:solidFill>
+              <a:effectLst/>
+              <a:latin typeface="Arial" panose="020B0604020202020204" pitchFamily="34" charset="0"/>
+            </a:endParaRPr>
+          </a:p>
+          <a:p>
+            <a:pPr>
+              <a:lnSpc>
+                <a:spcPct val="150000"/>
+              </a:lnSpc>
+              <a:buNone/>
+            </a:pPr>
+            <a:endParaRPr kumimoji="0" lang="en-US" altLang="en-US" sz="1300" b="0" i="0" u="none" strike="noStrike" cap="none" normalizeH="0" baseline="0">
+              <a:ln>
+                <a:noFill/>
+              </a:ln>
+              <a:solidFill>
+                <a:schemeClr val="tx1"/>
+              </a:solidFill>
+              <a:effectLst/>
+              <a:latin typeface="Arial" panose="020B0604020202020204" pitchFamily="34" charset="0"/>
+            </a:endParaRPr>
+          </a:p>
+        </p:txBody>
+      </p:sp>
+      <p:pic>
+        <p:nvPicPr>
+          <p:cNvPr id="4" name="Picture 3">
+            <a:extLst>
+              <a:ext uri="{FF2B5EF4-FFF2-40B4-BE49-F238E27FC236}">
+                <a16:creationId xmlns:a16="http://schemas.microsoft.com/office/drawing/2014/main" id="{67DB2FE1-020C-A4D4-87F3-93C07E7D5CD7}"/>
+              </a:ext>
+            </a:extLst>
+          </p:cNvPr>
+          <p:cNvPicPr>
+            <a:picLocks noChangeAspect="1"/>
+          </p:cNvPicPr>
+          <p:nvPr/>
+        </p:nvPicPr>
+        <p:blipFill>
+          <a:blip r:embed="rId2"/>
+          <a:stretch>
+            <a:fillRect/>
+          </a:stretch>
+        </p:blipFill>
+        <p:spPr>
+          <a:xfrm>
+            <a:off x="0" y="2237730"/>
+            <a:ext cx="10126488" cy="4620270"/>
+          </a:xfrm>
+          <a:prstGeom prst="rect">
+            <a:avLst/>
+          </a:prstGeom>
+        </p:spPr>
+      </p:pic>
+    </p:spTree>
+    <p:extLst>
+      <p:ext uri="{BB962C8B-B14F-4D97-AF65-F5344CB8AC3E}">
+        <p14:creationId xmlns:p14="http://schemas.microsoft.com/office/powerpoint/2010/main" val="456314142"/>
+      </p:ext>
+    </p:extLst>
+  </p:cSld>
+  <p:clrMapOvr>
+    <a:masterClrMapping/>
+  </p:clrMapOvr>
+</p:sld>
+</file>
+
+<file path=ppt/slides/slide14.xml><?xml version="1.0" encoding="utf-8"?>
+<p:sld xmlns:a="http://schemas.openxmlformats.org/drawingml/2006/main" xmlns:r="http://schemas.openxmlformats.org/officeDocument/2006/relationships" xmlns:p="http://schemas.openxmlformats.org/presentationml/2006/main">
+  <p:cSld>
+    <p:spTree>
+      <p:nvGrpSpPr>
+        <p:cNvPr id="1" name="">
+          <a:extLst>
+            <a:ext uri="{FF2B5EF4-FFF2-40B4-BE49-F238E27FC236}">
+              <a16:creationId xmlns:a16="http://schemas.microsoft.com/office/drawing/2014/main" id="{D0FCF0E6-1DA4-26A6-D6FF-93CA1C90CB3A}"/>
+            </a:ext>
+          </a:extLst>
+        </p:cNvPr>
+        <p:cNvGrpSpPr/>
+        <p:nvPr/>
+      </p:nvGrpSpPr>
+      <p:grpSpPr>
+        <a:xfrm>
+          <a:off x="0" y="0"/>
+          <a:ext cx="0" cy="0"/>
+          <a:chOff x="0" y="0"/>
+          <a:chExt cx="0" cy="0"/>
+        </a:xfrm>
+      </p:grpSpPr>
+      <p:sp>
+        <p:nvSpPr>
+          <p:cNvPr id="3" name="TextBox 2">
+            <a:extLst>
+              <a:ext uri="{FF2B5EF4-FFF2-40B4-BE49-F238E27FC236}">
+                <a16:creationId xmlns:a16="http://schemas.microsoft.com/office/drawing/2014/main" id="{621F5DC8-B491-92DF-F577-6916C5027514}"/>
+              </a:ext>
+            </a:extLst>
+          </p:cNvPr>
+          <p:cNvSpPr txBox="1"/>
+          <p:nvPr/>
+        </p:nvSpPr>
+        <p:spPr>
+          <a:xfrm>
+            <a:off x="217714" y="255046"/>
+            <a:ext cx="11756571" cy="2863733"/>
+          </a:xfrm>
+          <a:prstGeom prst="rect">
+            <a:avLst/>
+          </a:prstGeom>
+          <a:noFill/>
+        </p:spPr>
+        <p:txBody>
+          <a:bodyPr wrap="square">
+            <a:spAutoFit/>
+          </a:bodyPr>
+          <a:lstStyle/>
+          <a:p>
+            <a:pPr>
+              <a:lnSpc>
+                <a:spcPct val="150000"/>
+              </a:lnSpc>
+              <a:buNone/>
+            </a:pPr>
+            <a:r>
+              <a:rPr lang="fr-FR" altLang="en-US" sz="1300">
+                <a:latin typeface="Arial" panose="020B0604020202020204" pitchFamily="34" charset="0"/>
+                <a:cs typeface="Arial" panose="020B0604020202020204" pitchFamily="34" charset="0"/>
+              </a:rPr>
+              <a:t>Autoload-a əlavə et</a:t>
+            </a:r>
+            <a:r>
+              <a:rPr lang="az-Latn-AZ" altLang="en-US" sz="1300">
+                <a:latin typeface="Arial" panose="020B0604020202020204" pitchFamily="34" charset="0"/>
+                <a:cs typeface="Arial" panose="020B0604020202020204" pitchFamily="34" charset="0"/>
+              </a:rPr>
+              <a:t>: </a:t>
+            </a:r>
+            <a:r>
+              <a:rPr lang="fr-FR" altLang="en-US" sz="1300">
+                <a:latin typeface="Arial" panose="020B0604020202020204" pitchFamily="34" charset="0"/>
+                <a:cs typeface="Arial" panose="020B0604020202020204" pitchFamily="34" charset="0"/>
+              </a:rPr>
+              <a:t> </a:t>
+            </a:r>
+            <a:r>
+              <a:rPr lang="fr-FR" altLang="en-US" sz="1300" b="1">
+                <a:latin typeface="Arial" panose="020B0604020202020204" pitchFamily="34" charset="0"/>
+                <a:cs typeface="Arial" panose="020B0604020202020204" pitchFamily="34" charset="0"/>
+              </a:rPr>
+              <a:t>composer.json</a:t>
+            </a:r>
+            <a:r>
+              <a:rPr lang="fr-FR" altLang="en-US" sz="1300">
+                <a:latin typeface="Arial" panose="020B0604020202020204" pitchFamily="34" charset="0"/>
+                <a:cs typeface="Arial" panose="020B0604020202020204" pitchFamily="34" charset="0"/>
+              </a:rPr>
+              <a:t> faylında:</a:t>
+            </a:r>
+            <a:endParaRPr lang="az-Latn-AZ" altLang="en-US" sz="1300">
+              <a:latin typeface="Arial" panose="020B0604020202020204" pitchFamily="34" charset="0"/>
+              <a:cs typeface="Arial" panose="020B0604020202020204" pitchFamily="34" charset="0"/>
+            </a:endParaRPr>
+          </a:p>
+          <a:p>
+            <a:pPr>
+              <a:lnSpc>
+                <a:spcPct val="150000"/>
+              </a:lnSpc>
+              <a:buNone/>
+            </a:pPr>
+            <a:endParaRPr kumimoji="0" lang="az-Latn-AZ" altLang="en-US" sz="1300" b="0" i="0" u="none" strike="noStrike" cap="none" normalizeH="0" baseline="0">
+              <a:ln>
+                <a:noFill/>
+              </a:ln>
+              <a:solidFill>
+                <a:schemeClr val="tx1"/>
+              </a:solidFill>
+              <a:effectLst/>
+              <a:latin typeface="Arial" panose="020B0604020202020204" pitchFamily="34" charset="0"/>
+              <a:cs typeface="Arial" panose="020B0604020202020204" pitchFamily="34" charset="0"/>
+            </a:endParaRPr>
+          </a:p>
+          <a:p>
+            <a:pPr>
+              <a:lnSpc>
+                <a:spcPct val="150000"/>
+              </a:lnSpc>
+              <a:buNone/>
+            </a:pPr>
+            <a:endParaRPr lang="az-Latn-AZ" altLang="en-US" sz="1300">
+              <a:latin typeface="Arial" panose="020B0604020202020204" pitchFamily="34" charset="0"/>
+              <a:cs typeface="Arial" panose="020B0604020202020204" pitchFamily="34" charset="0"/>
+            </a:endParaRPr>
+          </a:p>
+          <a:p>
+            <a:pPr>
+              <a:lnSpc>
+                <a:spcPct val="150000"/>
+              </a:lnSpc>
+              <a:buNone/>
+            </a:pPr>
+            <a:endParaRPr kumimoji="0" lang="az-Latn-AZ" altLang="en-US" sz="1300" b="0" i="0" u="none" strike="noStrike" cap="none" normalizeH="0" baseline="0">
+              <a:ln>
+                <a:noFill/>
+              </a:ln>
+              <a:solidFill>
+                <a:schemeClr val="tx1"/>
+              </a:solidFill>
+              <a:effectLst/>
+              <a:latin typeface="Arial" panose="020B0604020202020204" pitchFamily="34" charset="0"/>
+              <a:cs typeface="Arial" panose="020B0604020202020204" pitchFamily="34" charset="0"/>
+            </a:endParaRPr>
+          </a:p>
+          <a:p>
+            <a:pPr>
+              <a:lnSpc>
+                <a:spcPct val="150000"/>
+              </a:lnSpc>
+              <a:buNone/>
+            </a:pPr>
+            <a:endParaRPr lang="az-Latn-AZ" altLang="en-US" sz="1300">
+              <a:latin typeface="Arial" panose="020B0604020202020204" pitchFamily="34" charset="0"/>
+              <a:cs typeface="Arial" panose="020B0604020202020204" pitchFamily="34" charset="0"/>
+            </a:endParaRPr>
+          </a:p>
+          <a:p>
+            <a:pPr>
+              <a:lnSpc>
+                <a:spcPct val="150000"/>
+              </a:lnSpc>
+              <a:buNone/>
+            </a:pPr>
+            <a:endParaRPr kumimoji="0" lang="az-Latn-AZ" altLang="en-US" sz="1300" b="0" i="0" u="none" strike="noStrike" cap="none" normalizeH="0" baseline="0">
+              <a:ln>
+                <a:noFill/>
+              </a:ln>
+              <a:solidFill>
+                <a:schemeClr val="tx1"/>
+              </a:solidFill>
+              <a:effectLst/>
+              <a:latin typeface="Arial" panose="020B0604020202020204" pitchFamily="34" charset="0"/>
+              <a:cs typeface="Arial" panose="020B0604020202020204" pitchFamily="34" charset="0"/>
+            </a:endParaRPr>
+          </a:p>
+          <a:p>
+            <a:pPr>
+              <a:lnSpc>
+                <a:spcPct val="150000"/>
+              </a:lnSpc>
+              <a:buNone/>
+            </a:pPr>
+            <a:endParaRPr lang="az-Latn-AZ" altLang="en-US" sz="1300">
+              <a:latin typeface="Arial" panose="020B0604020202020204" pitchFamily="34" charset="0"/>
+              <a:cs typeface="Arial" panose="020B0604020202020204" pitchFamily="34" charset="0"/>
+            </a:endParaRPr>
+          </a:p>
+          <a:p>
+            <a:pPr>
+              <a:lnSpc>
+                <a:spcPct val="150000"/>
+              </a:lnSpc>
+              <a:buNone/>
+            </a:pPr>
+            <a:endParaRPr kumimoji="0" lang="az-Latn-AZ" altLang="en-US" sz="1300" b="0" i="0" u="none" strike="noStrike" cap="none" normalizeH="0" baseline="0">
+              <a:ln>
+                <a:noFill/>
+              </a:ln>
+              <a:solidFill>
+                <a:schemeClr val="tx1"/>
+              </a:solidFill>
+              <a:effectLst/>
+              <a:latin typeface="Arial" panose="020B0604020202020204" pitchFamily="34" charset="0"/>
+              <a:cs typeface="Arial" panose="020B0604020202020204" pitchFamily="34" charset="0"/>
+            </a:endParaRPr>
+          </a:p>
+          <a:p>
+            <a:pPr>
+              <a:lnSpc>
+                <a:spcPct val="150000"/>
+              </a:lnSpc>
+              <a:buNone/>
+            </a:pPr>
+            <a:r>
+              <a:rPr lang="en-US" sz="1400">
+                <a:latin typeface="Arial" panose="020B0604020202020204" pitchFamily="34" charset="0"/>
+                <a:cs typeface="Arial" panose="020B0604020202020204" pitchFamily="34" charset="0"/>
+              </a:rPr>
+              <a:t>Sonra terminalda:</a:t>
+            </a:r>
+            <a:endParaRPr kumimoji="0" lang="en-US" altLang="en-US" sz="1300" b="0" i="0" u="none" strike="noStrike" cap="none" normalizeH="0" baseline="0">
+              <a:ln>
+                <a:noFill/>
+              </a:ln>
+              <a:solidFill>
+                <a:schemeClr val="tx1"/>
+              </a:solidFill>
+              <a:effectLst/>
+              <a:latin typeface="Arial" panose="020B0604020202020204" pitchFamily="34" charset="0"/>
+              <a:cs typeface="Arial" panose="020B0604020202020204" pitchFamily="34" charset="0"/>
+            </a:endParaRPr>
+          </a:p>
+        </p:txBody>
+      </p:sp>
+      <p:pic>
+        <p:nvPicPr>
+          <p:cNvPr id="4" name="Picture 3">
+            <a:extLst>
+              <a:ext uri="{FF2B5EF4-FFF2-40B4-BE49-F238E27FC236}">
+                <a16:creationId xmlns:a16="http://schemas.microsoft.com/office/drawing/2014/main" id="{B3EEE7A7-0EB6-1515-05D6-2C439DEF9600}"/>
+              </a:ext>
+            </a:extLst>
+          </p:cNvPr>
+          <p:cNvPicPr>
+            <a:picLocks noChangeAspect="1"/>
+          </p:cNvPicPr>
+          <p:nvPr/>
+        </p:nvPicPr>
+        <p:blipFill>
+          <a:blip r:embed="rId2"/>
+          <a:stretch>
+            <a:fillRect/>
+          </a:stretch>
+        </p:blipFill>
+        <p:spPr>
+          <a:xfrm>
+            <a:off x="0" y="763210"/>
+            <a:ext cx="2305372" cy="1286054"/>
+          </a:xfrm>
+          <a:prstGeom prst="rect">
+            <a:avLst/>
+          </a:prstGeom>
+        </p:spPr>
+      </p:pic>
+      <p:pic>
+        <p:nvPicPr>
+          <p:cNvPr id="6" name="Picture 5">
+            <a:extLst>
+              <a:ext uri="{FF2B5EF4-FFF2-40B4-BE49-F238E27FC236}">
+                <a16:creationId xmlns:a16="http://schemas.microsoft.com/office/drawing/2014/main" id="{4829977E-844F-FA9A-F9C2-C93F329858D1}"/>
+              </a:ext>
+            </a:extLst>
+          </p:cNvPr>
+          <p:cNvPicPr>
+            <a:picLocks noChangeAspect="1"/>
+          </p:cNvPicPr>
+          <p:nvPr/>
+        </p:nvPicPr>
+        <p:blipFill>
+          <a:blip r:embed="rId3"/>
+          <a:stretch>
+            <a:fillRect/>
+          </a:stretch>
+        </p:blipFill>
+        <p:spPr>
+          <a:xfrm>
+            <a:off x="0" y="3047947"/>
+            <a:ext cx="1943371" cy="381053"/>
+          </a:xfrm>
+          <a:prstGeom prst="rect">
+            <a:avLst/>
+          </a:prstGeom>
+        </p:spPr>
+      </p:pic>
+    </p:spTree>
+    <p:extLst>
+      <p:ext uri="{BB962C8B-B14F-4D97-AF65-F5344CB8AC3E}">
+        <p14:creationId xmlns:p14="http://schemas.microsoft.com/office/powerpoint/2010/main" val="903323729"/>
+      </p:ext>
+    </p:extLst>
+  </p:cSld>
+  <p:clrMapOvr>
+    <a:masterClrMapping/>
+  </p:clrMapOvr>
+</p:sld>
+</file>
+
+<file path=ppt/slides/slide15.xml><?xml version="1.0" encoding="utf-8"?>
+<p:sld xmlns:a="http://schemas.openxmlformats.org/drawingml/2006/main" xmlns:r="http://schemas.openxmlformats.org/officeDocument/2006/relationships" xmlns:p="http://schemas.openxmlformats.org/presentationml/2006/main">
+  <p:cSld>
+    <p:spTree>
+      <p:nvGrpSpPr>
+        <p:cNvPr id="1" name="">
+          <a:extLst>
+            <a:ext uri="{FF2B5EF4-FFF2-40B4-BE49-F238E27FC236}">
+              <a16:creationId xmlns:a16="http://schemas.microsoft.com/office/drawing/2014/main" id="{CEB79E5F-04B8-3D2F-E4B3-188514425CB0}"/>
+            </a:ext>
+          </a:extLst>
+        </p:cNvPr>
+        <p:cNvGrpSpPr/>
+        <p:nvPr/>
+      </p:nvGrpSpPr>
+      <p:grpSpPr>
+        <a:xfrm>
+          <a:off x="0" y="0"/>
+          <a:ext cx="0" cy="0"/>
+          <a:chOff x="0" y="0"/>
+          <a:chExt cx="0" cy="0"/>
+        </a:xfrm>
+      </p:grpSpPr>
+      <p:sp>
+        <p:nvSpPr>
+          <p:cNvPr id="3" name="TextBox 2">
+            <a:extLst>
+              <a:ext uri="{FF2B5EF4-FFF2-40B4-BE49-F238E27FC236}">
+                <a16:creationId xmlns:a16="http://schemas.microsoft.com/office/drawing/2014/main" id="{B33CEAF0-0298-CD61-5770-FF1E2F85BDC2}"/>
+              </a:ext>
+            </a:extLst>
+          </p:cNvPr>
+          <p:cNvSpPr txBox="1"/>
+          <p:nvPr/>
+        </p:nvSpPr>
+        <p:spPr>
+          <a:xfrm>
+            <a:off x="217714" y="255046"/>
+            <a:ext cx="11756571" cy="2756011"/>
+          </a:xfrm>
+          <a:prstGeom prst="rect">
+            <a:avLst/>
+          </a:prstGeom>
+          <a:noFill/>
+        </p:spPr>
+        <p:txBody>
+          <a:bodyPr wrap="square">
+            <a:spAutoFit/>
+          </a:bodyPr>
+          <a:lstStyle/>
+          <a:p>
+            <a:pPr>
+              <a:lnSpc>
+                <a:spcPct val="150000"/>
+              </a:lnSpc>
+              <a:buNone/>
+            </a:pPr>
+            <a:r>
+              <a:rPr lang="en-US" altLang="en-US" sz="1300">
+                <a:latin typeface="Arial" panose="020B0604020202020204" pitchFamily="34" charset="0"/>
+              </a:rPr>
+              <a:t>İstifadə nümunələri Blade-də:</a:t>
+            </a:r>
+            <a:endParaRPr lang="az-Latn-AZ" altLang="en-US" sz="1300">
+              <a:latin typeface="Arial" panose="020B0604020202020204" pitchFamily="34" charset="0"/>
+            </a:endParaRPr>
+          </a:p>
+          <a:p>
+            <a:pPr>
+              <a:lnSpc>
+                <a:spcPct val="150000"/>
+              </a:lnSpc>
+              <a:buNone/>
+            </a:pPr>
+            <a:endParaRPr kumimoji="0" lang="az-Latn-AZ" altLang="en-US" sz="1300" b="0" i="0" u="none" strike="noStrike" cap="none" normalizeH="0" baseline="0">
+              <a:ln>
+                <a:noFill/>
+              </a:ln>
+              <a:solidFill>
+                <a:schemeClr val="tx1"/>
+              </a:solidFill>
+              <a:effectLst/>
+              <a:latin typeface="Arial" panose="020B0604020202020204" pitchFamily="34" charset="0"/>
+            </a:endParaRPr>
+          </a:p>
+          <a:p>
+            <a:pPr>
+              <a:lnSpc>
+                <a:spcPct val="150000"/>
+              </a:lnSpc>
+              <a:buNone/>
+            </a:pPr>
+            <a:endParaRPr lang="az-Latn-AZ" altLang="en-US" sz="1300">
+              <a:latin typeface="Arial" panose="020B0604020202020204" pitchFamily="34" charset="0"/>
+            </a:endParaRPr>
+          </a:p>
+          <a:p>
+            <a:pPr>
+              <a:lnSpc>
+                <a:spcPct val="150000"/>
+              </a:lnSpc>
+              <a:buNone/>
+            </a:pPr>
+            <a:endParaRPr kumimoji="0" lang="az-Latn-AZ" altLang="en-US" sz="1300" b="0" i="0" u="none" strike="noStrike" cap="none" normalizeH="0" baseline="0">
+              <a:ln>
+                <a:noFill/>
+              </a:ln>
+              <a:solidFill>
+                <a:schemeClr val="tx1"/>
+              </a:solidFill>
+              <a:effectLst/>
+              <a:latin typeface="Arial" panose="020B0604020202020204" pitchFamily="34" charset="0"/>
+            </a:endParaRPr>
+          </a:p>
+          <a:p>
+            <a:pPr>
+              <a:lnSpc>
+                <a:spcPct val="150000"/>
+              </a:lnSpc>
+              <a:buNone/>
+            </a:pPr>
+            <a:endParaRPr lang="az-Latn-AZ" altLang="en-US" sz="1300">
+              <a:latin typeface="Arial" panose="020B0604020202020204" pitchFamily="34" charset="0"/>
+            </a:endParaRPr>
+          </a:p>
+          <a:p>
+            <a:pPr>
+              <a:lnSpc>
+                <a:spcPct val="150000"/>
+              </a:lnSpc>
+              <a:buNone/>
+            </a:pPr>
+            <a:endParaRPr kumimoji="0" lang="az-Latn-AZ" altLang="en-US" sz="1300" b="0" i="0" u="none" strike="noStrike" cap="none" normalizeH="0" baseline="0">
+              <a:ln>
+                <a:noFill/>
+              </a:ln>
+              <a:solidFill>
+                <a:schemeClr val="tx1"/>
+              </a:solidFill>
+              <a:effectLst/>
+              <a:latin typeface="Arial" panose="020B0604020202020204" pitchFamily="34" charset="0"/>
+            </a:endParaRPr>
+          </a:p>
+          <a:p>
+            <a:pPr>
+              <a:lnSpc>
+                <a:spcPct val="150000"/>
+              </a:lnSpc>
+              <a:buNone/>
+            </a:pPr>
+            <a:endParaRPr lang="az-Latn-AZ" altLang="en-US" sz="1300">
+              <a:latin typeface="Arial" panose="020B0604020202020204" pitchFamily="34" charset="0"/>
+            </a:endParaRPr>
+          </a:p>
+          <a:p>
+            <a:pPr>
+              <a:lnSpc>
+                <a:spcPct val="150000"/>
+              </a:lnSpc>
+              <a:buNone/>
+            </a:pPr>
+            <a:endParaRPr kumimoji="0" lang="az-Latn-AZ" altLang="en-US" sz="1300" b="0" i="0" u="none" strike="noStrike" cap="none" normalizeH="0" baseline="0">
+              <a:ln>
+                <a:noFill/>
+              </a:ln>
+              <a:solidFill>
+                <a:schemeClr val="tx1"/>
+              </a:solidFill>
+              <a:effectLst/>
+              <a:latin typeface="Arial" panose="020B0604020202020204" pitchFamily="34" charset="0"/>
+            </a:endParaRPr>
+          </a:p>
+          <a:p>
+            <a:pPr>
+              <a:lnSpc>
+                <a:spcPct val="150000"/>
+              </a:lnSpc>
+              <a:buNone/>
+            </a:pPr>
+            <a:r>
+              <a:rPr lang="en-US" altLang="en-US" sz="1300">
+                <a:latin typeface="Arial" panose="020B0604020202020204" pitchFamily="34" charset="0"/>
+              </a:rPr>
+              <a:t>Controller-də:</a:t>
+            </a:r>
+            <a:endParaRPr kumimoji="0" lang="en-US" altLang="en-US" sz="1300" b="0" i="0" u="none" strike="noStrike" cap="none" normalizeH="0" baseline="0">
+              <a:ln>
+                <a:noFill/>
+              </a:ln>
+              <a:solidFill>
+                <a:schemeClr val="tx1"/>
+              </a:solidFill>
+              <a:effectLst/>
+              <a:latin typeface="Arial" panose="020B0604020202020204" pitchFamily="34" charset="0"/>
+            </a:endParaRPr>
+          </a:p>
+        </p:txBody>
+      </p:sp>
+      <p:pic>
+        <p:nvPicPr>
+          <p:cNvPr id="2" name="Picture 1">
+            <a:extLst>
+              <a:ext uri="{FF2B5EF4-FFF2-40B4-BE49-F238E27FC236}">
+                <a16:creationId xmlns:a16="http://schemas.microsoft.com/office/drawing/2014/main" id="{2E86347F-6477-13CC-3A88-427B59A65929}"/>
+              </a:ext>
+            </a:extLst>
+          </p:cNvPr>
+          <p:cNvPicPr>
+            <a:picLocks noChangeAspect="1"/>
+          </p:cNvPicPr>
+          <p:nvPr/>
+        </p:nvPicPr>
+        <p:blipFill>
+          <a:blip r:embed="rId2"/>
+          <a:stretch>
+            <a:fillRect/>
+          </a:stretch>
+        </p:blipFill>
+        <p:spPr>
+          <a:xfrm>
+            <a:off x="0" y="724733"/>
+            <a:ext cx="2524477" cy="476316"/>
+          </a:xfrm>
+          <a:prstGeom prst="rect">
+            <a:avLst/>
+          </a:prstGeom>
+        </p:spPr>
+      </p:pic>
+      <p:pic>
+        <p:nvPicPr>
+          <p:cNvPr id="5" name="Picture 4">
+            <a:extLst>
+              <a:ext uri="{FF2B5EF4-FFF2-40B4-BE49-F238E27FC236}">
+                <a16:creationId xmlns:a16="http://schemas.microsoft.com/office/drawing/2014/main" id="{908FDC30-0C8D-FF99-091F-3C9F8055B813}"/>
+              </a:ext>
+            </a:extLst>
+          </p:cNvPr>
+          <p:cNvPicPr>
+            <a:picLocks noChangeAspect="1"/>
+          </p:cNvPicPr>
+          <p:nvPr/>
+        </p:nvPicPr>
+        <p:blipFill>
+          <a:blip r:embed="rId3"/>
+          <a:stretch>
+            <a:fillRect/>
+          </a:stretch>
+        </p:blipFill>
+        <p:spPr>
+          <a:xfrm>
+            <a:off x="0" y="3086300"/>
+            <a:ext cx="4124901" cy="1276528"/>
+          </a:xfrm>
+          <a:prstGeom prst="rect">
+            <a:avLst/>
+          </a:prstGeom>
+        </p:spPr>
+      </p:pic>
+    </p:spTree>
+    <p:extLst>
+      <p:ext uri="{BB962C8B-B14F-4D97-AF65-F5344CB8AC3E}">
+        <p14:creationId xmlns:p14="http://schemas.microsoft.com/office/powerpoint/2010/main" val="1294836823"/>
+      </p:ext>
+    </p:extLst>
+  </p:cSld>
+  <p:clrMapOvr>
+    <a:masterClrMapping/>
+  </p:clrMapOvr>
+</p:sld>
+</file>
+
+<file path=ppt/slides/slide16.xml><?xml version="1.0" encoding="utf-8"?>
+<p:sld xmlns:a="http://schemas.openxmlformats.org/drawingml/2006/main" xmlns:r="http://schemas.openxmlformats.org/officeDocument/2006/relationships" xmlns:p="http://schemas.openxmlformats.org/presentationml/2006/main">
+  <p:cSld>
+    <p:spTree>
+      <p:nvGrpSpPr>
+        <p:cNvPr id="1" name="">
+          <a:extLst>
+            <a:ext uri="{FF2B5EF4-FFF2-40B4-BE49-F238E27FC236}">
+              <a16:creationId xmlns:a16="http://schemas.microsoft.com/office/drawing/2014/main" id="{CB2F199C-A874-A822-2096-0CF661FA71B2}"/>
+            </a:ext>
+          </a:extLst>
+        </p:cNvPr>
+        <p:cNvGrpSpPr/>
+        <p:nvPr/>
+      </p:nvGrpSpPr>
+      <p:grpSpPr>
+        <a:xfrm>
+          <a:off x="0" y="0"/>
+          <a:ext cx="0" cy="0"/>
+          <a:chOff x="0" y="0"/>
+          <a:chExt cx="0" cy="0"/>
+        </a:xfrm>
+      </p:grpSpPr>
+      <p:sp>
+        <p:nvSpPr>
+          <p:cNvPr id="3" name="TextBox 2">
+            <a:extLst>
+              <a:ext uri="{FF2B5EF4-FFF2-40B4-BE49-F238E27FC236}">
+                <a16:creationId xmlns:a16="http://schemas.microsoft.com/office/drawing/2014/main" id="{C86E4DAB-A8C0-C475-971C-9A259464A36E}"/>
+              </a:ext>
+            </a:extLst>
+          </p:cNvPr>
+          <p:cNvSpPr txBox="1"/>
+          <p:nvPr/>
+        </p:nvSpPr>
+        <p:spPr>
+          <a:xfrm>
             <a:off x="217714" y="255046"/>
             <a:ext cx="11756571" cy="355354"/>
           </a:xfrm>
@@ -3387,7 +5893,179 @@
     </p:spTree>
     <p:extLst>
       <p:ext uri="{BB962C8B-B14F-4D97-AF65-F5344CB8AC3E}">
-        <p14:creationId xmlns:p14="http://schemas.microsoft.com/office/powerpoint/2010/main" val="3863838039"/>
+        <p14:creationId xmlns:p14="http://schemas.microsoft.com/office/powerpoint/2010/main" val="1302621694"/>
+      </p:ext>
+    </p:extLst>
+  </p:cSld>
+  <p:clrMapOvr>
+    <a:masterClrMapping/>
+  </p:clrMapOvr>
+</p:sld>
+</file>
+
+<file path=ppt/slides/slide17.xml><?xml version="1.0" encoding="utf-8"?>
+<p:sld xmlns:a="http://schemas.openxmlformats.org/drawingml/2006/main" xmlns:r="http://schemas.openxmlformats.org/officeDocument/2006/relationships" xmlns:p="http://schemas.openxmlformats.org/presentationml/2006/main">
+  <p:cSld>
+    <p:spTree>
+      <p:nvGrpSpPr>
+        <p:cNvPr id="1" name="">
+          <a:extLst>
+            <a:ext uri="{FF2B5EF4-FFF2-40B4-BE49-F238E27FC236}">
+              <a16:creationId xmlns:a16="http://schemas.microsoft.com/office/drawing/2014/main" id="{4BA81ED2-878B-1708-10EB-986DDE3C4BC3}"/>
+            </a:ext>
+          </a:extLst>
+        </p:cNvPr>
+        <p:cNvGrpSpPr/>
+        <p:nvPr/>
+      </p:nvGrpSpPr>
+      <p:grpSpPr>
+        <a:xfrm>
+          <a:off x="0" y="0"/>
+          <a:ext cx="0" cy="0"/>
+          <a:chOff x="0" y="0"/>
+          <a:chExt cx="0" cy="0"/>
+        </a:xfrm>
+      </p:grpSpPr>
+      <p:sp>
+        <p:nvSpPr>
+          <p:cNvPr id="3" name="TextBox 2">
+            <a:extLst>
+              <a:ext uri="{FF2B5EF4-FFF2-40B4-BE49-F238E27FC236}">
+                <a16:creationId xmlns:a16="http://schemas.microsoft.com/office/drawing/2014/main" id="{FEF8E391-1F5A-A92D-AE4D-6A1EF8FC27D3}"/>
+              </a:ext>
+            </a:extLst>
+          </p:cNvPr>
+          <p:cNvSpPr txBox="1"/>
+          <p:nvPr/>
+        </p:nvSpPr>
+        <p:spPr>
+          <a:xfrm>
+            <a:off x="217714" y="255046"/>
+            <a:ext cx="11756571" cy="355354"/>
+          </a:xfrm>
+          <a:prstGeom prst="rect">
+            <a:avLst/>
+          </a:prstGeom>
+          <a:noFill/>
+        </p:spPr>
+        <p:txBody>
+          <a:bodyPr wrap="square">
+            <a:spAutoFit/>
+          </a:bodyPr>
+          <a:lstStyle/>
+          <a:p>
+            <a:pPr>
+              <a:lnSpc>
+                <a:spcPct val="150000"/>
+              </a:lnSpc>
+              <a:buNone/>
+            </a:pPr>
+            <a:r>
+              <a:rPr kumimoji="0" lang="en-US" altLang="en-US" sz="1300" b="0" i="0" u="none" strike="noStrike" cap="none" normalizeH="0" baseline="0">
+                <a:ln>
+                  <a:noFill/>
+                </a:ln>
+                <a:solidFill>
+                  <a:schemeClr val="tx1"/>
+                </a:solidFill>
+                <a:effectLst/>
+                <a:latin typeface="Arial" panose="020B0604020202020204" pitchFamily="34" charset="0"/>
+              </a:rPr>
+              <a:t>.</a:t>
+            </a:r>
+          </a:p>
+        </p:txBody>
+      </p:sp>
+    </p:spTree>
+    <p:extLst>
+      <p:ext uri="{BB962C8B-B14F-4D97-AF65-F5344CB8AC3E}">
+        <p14:creationId xmlns:p14="http://schemas.microsoft.com/office/powerpoint/2010/main" val="2296996098"/>
+      </p:ext>
+    </p:extLst>
+  </p:cSld>
+  <p:clrMapOvr>
+    <a:masterClrMapping/>
+  </p:clrMapOvr>
+</p:sld>
+</file>
+
+<file path=ppt/slides/slide18.xml><?xml version="1.0" encoding="utf-8"?>
+<p:sld xmlns:a="http://schemas.openxmlformats.org/drawingml/2006/main" xmlns:r="http://schemas.openxmlformats.org/officeDocument/2006/relationships" xmlns:p="http://schemas.openxmlformats.org/presentationml/2006/main">
+  <p:cSld>
+    <p:spTree>
+      <p:nvGrpSpPr>
+        <p:cNvPr id="1" name="">
+          <a:extLst>
+            <a:ext uri="{FF2B5EF4-FFF2-40B4-BE49-F238E27FC236}">
+              <a16:creationId xmlns:a16="http://schemas.microsoft.com/office/drawing/2014/main" id="{EE5403E2-D74B-2067-EFEE-52F32900A149}"/>
+            </a:ext>
+          </a:extLst>
+        </p:cNvPr>
+        <p:cNvGrpSpPr/>
+        <p:nvPr/>
+      </p:nvGrpSpPr>
+      <p:grpSpPr>
+        <a:xfrm>
+          <a:off x="0" y="0"/>
+          <a:ext cx="0" cy="0"/>
+          <a:chOff x="0" y="0"/>
+          <a:chExt cx="0" cy="0"/>
+        </a:xfrm>
+      </p:grpSpPr>
+      <p:sp>
+        <p:nvSpPr>
+          <p:cNvPr id="3" name="TextBox 2">
+            <a:extLst>
+              <a:ext uri="{FF2B5EF4-FFF2-40B4-BE49-F238E27FC236}">
+                <a16:creationId xmlns:a16="http://schemas.microsoft.com/office/drawing/2014/main" id="{CA20A5B0-849E-7962-42AF-6BDBE42E5ADF}"/>
+              </a:ext>
+            </a:extLst>
+          </p:cNvPr>
+          <p:cNvSpPr txBox="1"/>
+          <p:nvPr/>
+        </p:nvSpPr>
+        <p:spPr>
+          <a:xfrm>
+            <a:off x="217714" y="255046"/>
+            <a:ext cx="11756571" cy="355354"/>
+          </a:xfrm>
+          <a:prstGeom prst="rect">
+            <a:avLst/>
+          </a:prstGeom>
+          <a:noFill/>
+        </p:spPr>
+        <p:txBody>
+          <a:bodyPr wrap="square">
+            <a:spAutoFit/>
+          </a:bodyPr>
+          <a:lstStyle/>
+          <a:p>
+            <a:pPr>
+              <a:lnSpc>
+                <a:spcPct val="150000"/>
+              </a:lnSpc>
+              <a:buNone/>
+            </a:pPr>
+            <a:r>
+              <a:rPr kumimoji="0" lang="en-US" altLang="en-US" sz="1300" b="0" i="0" u="none" strike="noStrike" cap="none" normalizeH="0" baseline="0">
+                <a:ln>
+                  <a:noFill/>
+                </a:ln>
+                <a:solidFill>
+                  <a:schemeClr val="tx1"/>
+                </a:solidFill>
+                <a:effectLst/>
+                <a:latin typeface="Arial" panose="020B0604020202020204" pitchFamily="34" charset="0"/>
+              </a:rPr>
+              <a:t>.</a:t>
+            </a:r>
+          </a:p>
+        </p:txBody>
+      </p:sp>
+    </p:spTree>
+    <p:extLst>
+      <p:ext uri="{BB962C8B-B14F-4D97-AF65-F5344CB8AC3E}">
+        <p14:creationId xmlns:p14="http://schemas.microsoft.com/office/powerpoint/2010/main" val="345133862"/>
       </p:ext>
     </p:extLst>
   </p:cSld>
@@ -3455,21 +6133,54 @@
               <a:buNone/>
             </a:pPr>
             <a:r>
-              <a:rPr kumimoji="0" lang="en-US" altLang="en-US" sz="1300" b="0" i="0" u="none" strike="noStrike" cap="none" normalizeH="0" baseline="0">
-                <a:ln>
-                  <a:noFill/>
-                </a:ln>
-                <a:solidFill>
-                  <a:schemeClr val="tx1"/>
-                </a:solidFill>
-                <a:effectLst/>
-                <a:latin typeface="Arial" panose="020B0604020202020204" pitchFamily="34" charset="0"/>
-              </a:rPr>
-              <a:t>.</a:t>
-            </a:r>
+              <a:rPr lang="az-Latn-AZ" altLang="en-US" sz="1300">
+                <a:latin typeface="Arial" panose="020B0604020202020204" pitchFamily="34" charset="0"/>
+              </a:rPr>
+              <a:t>İlk öncə səliqəli şəkillər əlavə edək.</a:t>
+            </a:r>
+            <a:endParaRPr kumimoji="0" lang="en-US" altLang="en-US" sz="1300" b="0" i="0" u="none" strike="noStrike" cap="none" normalizeH="0" baseline="0">
+              <a:ln>
+                <a:noFill/>
+              </a:ln>
+              <a:solidFill>
+                <a:schemeClr val="tx1"/>
+              </a:solidFill>
+              <a:effectLst/>
+              <a:latin typeface="Arial" panose="020B0604020202020204" pitchFamily="34" charset="0"/>
+            </a:endParaRPr>
           </a:p>
         </p:txBody>
       </p:sp>
+      <p:pic>
+        <p:nvPicPr>
+          <p:cNvPr id="4" name="Picture 3">
+            <a:extLst>
+              <a:ext uri="{FF2B5EF4-FFF2-40B4-BE49-F238E27FC236}">
+                <a16:creationId xmlns:a16="http://schemas.microsoft.com/office/drawing/2014/main" id="{BE938DCD-E218-923B-5492-95693B56C4C7}"/>
+              </a:ext>
+            </a:extLst>
+          </p:cNvPr>
+          <p:cNvPicPr>
+            <a:picLocks noChangeAspect="1"/>
+          </p:cNvPicPr>
+          <p:nvPr/>
+        </p:nvPicPr>
+        <p:blipFill>
+          <a:blip r:embed="rId2"/>
+          <a:stretch>
+            <a:fillRect/>
+          </a:stretch>
+        </p:blipFill>
+        <p:spPr>
+          <a:xfrm>
+            <a:off x="0" y="1527574"/>
+            <a:ext cx="12192000" cy="5330426"/>
+          </a:xfrm>
+          <a:prstGeom prst="rect">
+            <a:avLst/>
+          </a:prstGeom>
+        </p:spPr>
+      </p:pic>
     </p:spTree>
     <p:extLst>
       <p:ext uri="{BB962C8B-B14F-4D97-AF65-F5344CB8AC3E}">
@@ -3520,7 +6231,7 @@
         </p:nvSpPr>
         <p:spPr>
           <a:xfrm>
-            <a:off x="217714" y="255046"/>
+            <a:off x="217713" y="107212"/>
             <a:ext cx="11756571" cy="355354"/>
           </a:xfrm>
           <a:prstGeom prst="rect">
@@ -3541,25 +6252,2114 @@
               <a:buNone/>
             </a:pPr>
             <a:r>
-              <a:rPr kumimoji="0" lang="en-US" altLang="en-US" sz="1300" b="0" i="0" u="none" strike="noStrike" cap="none" normalizeH="0" baseline="0">
-                <a:ln>
-                  <a:noFill/>
-                </a:ln>
-                <a:solidFill>
-                  <a:schemeClr val="tx1"/>
-                </a:solidFill>
-                <a:effectLst/>
-                <a:latin typeface="Arial" panose="020B0604020202020204" pitchFamily="34" charset="0"/>
-              </a:rPr>
-              <a:t>.</a:t>
-            </a:r>
+              <a:rPr lang="az-Latn-AZ" altLang="en-US" sz="1300">
+                <a:latin typeface="Arial" panose="020B0604020202020204" pitchFamily="34" charset="0"/>
+              </a:rPr>
+              <a:t>Nəticə...</a:t>
+            </a:r>
+            <a:endParaRPr kumimoji="0" lang="en-US" altLang="en-US" sz="1300" b="0" i="0" u="none" strike="noStrike" cap="none" normalizeH="0" baseline="0">
+              <a:ln>
+                <a:noFill/>
+              </a:ln>
+              <a:solidFill>
+                <a:schemeClr val="tx1"/>
+              </a:solidFill>
+              <a:effectLst/>
+              <a:latin typeface="Arial" panose="020B0604020202020204" pitchFamily="34" charset="0"/>
+            </a:endParaRPr>
           </a:p>
         </p:txBody>
       </p:sp>
+      <p:pic>
+        <p:nvPicPr>
+          <p:cNvPr id="4" name="Picture 3">
+            <a:extLst>
+              <a:ext uri="{FF2B5EF4-FFF2-40B4-BE49-F238E27FC236}">
+                <a16:creationId xmlns:a16="http://schemas.microsoft.com/office/drawing/2014/main" id="{12087DFD-A412-5219-EA71-019CD5943594}"/>
+              </a:ext>
+            </a:extLst>
+          </p:cNvPr>
+          <p:cNvPicPr>
+            <a:picLocks noChangeAspect="1"/>
+          </p:cNvPicPr>
+          <p:nvPr/>
+        </p:nvPicPr>
+        <p:blipFill>
+          <a:blip r:embed="rId2"/>
+          <a:stretch>
+            <a:fillRect/>
+          </a:stretch>
+        </p:blipFill>
+        <p:spPr>
+          <a:xfrm>
+            <a:off x="-1" y="536457"/>
+            <a:ext cx="12192000" cy="6321543"/>
+          </a:xfrm>
+          <a:prstGeom prst="rect">
+            <a:avLst/>
+          </a:prstGeom>
+        </p:spPr>
+      </p:pic>
     </p:spTree>
     <p:extLst>
       <p:ext uri="{BB962C8B-B14F-4D97-AF65-F5344CB8AC3E}">
         <p14:creationId xmlns:p14="http://schemas.microsoft.com/office/powerpoint/2010/main" val="3095838342"/>
+      </p:ext>
+    </p:extLst>
+  </p:cSld>
+  <p:clrMapOvr>
+    <a:masterClrMapping/>
+  </p:clrMapOvr>
+</p:sld>
+</file>
+
+<file path=ppt/slides/slide4.xml><?xml version="1.0" encoding="utf-8"?>
+<p:sld xmlns:a="http://schemas.openxmlformats.org/drawingml/2006/main" xmlns:r="http://schemas.openxmlformats.org/officeDocument/2006/relationships" xmlns:p="http://schemas.openxmlformats.org/presentationml/2006/main">
+  <p:cSld>
+    <p:spTree>
+      <p:nvGrpSpPr>
+        <p:cNvPr id="1" name="">
+          <a:extLst>
+            <a:ext uri="{FF2B5EF4-FFF2-40B4-BE49-F238E27FC236}">
+              <a16:creationId xmlns:a16="http://schemas.microsoft.com/office/drawing/2014/main" id="{0EDF1674-836B-138E-9B6E-DBFC739FE045}"/>
+            </a:ext>
+          </a:extLst>
+        </p:cNvPr>
+        <p:cNvGrpSpPr/>
+        <p:nvPr/>
+      </p:nvGrpSpPr>
+      <p:grpSpPr>
+        <a:xfrm>
+          <a:off x="0" y="0"/>
+          <a:ext cx="0" cy="0"/>
+          <a:chOff x="0" y="0"/>
+          <a:chExt cx="0" cy="0"/>
+        </a:xfrm>
+      </p:grpSpPr>
+      <p:sp>
+        <p:nvSpPr>
+          <p:cNvPr id="3" name="TextBox 2">
+            <a:extLst>
+              <a:ext uri="{FF2B5EF4-FFF2-40B4-BE49-F238E27FC236}">
+                <a16:creationId xmlns:a16="http://schemas.microsoft.com/office/drawing/2014/main" id="{A1AF65B0-F207-CBBF-8D8D-FC871012A36D}"/>
+              </a:ext>
+            </a:extLst>
+          </p:cNvPr>
+          <p:cNvSpPr txBox="1"/>
+          <p:nvPr/>
+        </p:nvSpPr>
+        <p:spPr>
+          <a:xfrm>
+            <a:off x="217714" y="255046"/>
+            <a:ext cx="11756571" cy="1855764"/>
+          </a:xfrm>
+          <a:prstGeom prst="rect">
+            <a:avLst/>
+          </a:prstGeom>
+          <a:noFill/>
+        </p:spPr>
+        <p:txBody>
+          <a:bodyPr wrap="square">
+            <a:spAutoFit/>
+          </a:bodyPr>
+          <a:lstStyle/>
+          <a:p>
+            <a:pPr>
+              <a:lnSpc>
+                <a:spcPct val="150000"/>
+              </a:lnSpc>
+              <a:buNone/>
+            </a:pPr>
+            <a:r>
+              <a:rPr lang="az-Latn-AZ" altLang="en-US" sz="1300">
+                <a:latin typeface="Arial" panose="020B0604020202020204" pitchFamily="34" charset="0"/>
+              </a:rPr>
+              <a:t>Burada kiçik bir movzu haqqında məlumat vermək istəyirəm: </a:t>
+            </a:r>
+          </a:p>
+          <a:p>
+            <a:pPr marL="742950" lvl="1" indent="-285750">
+              <a:lnSpc>
+                <a:spcPct val="150000"/>
+              </a:lnSpc>
+              <a:buFont typeface="Wingdings" panose="05000000000000000000" pitchFamily="2" charset="2"/>
+              <a:buChar char="q"/>
+            </a:pPr>
+            <a:r>
+              <a:rPr lang="en-US" altLang="en-US" sz="1300" b="1">
+                <a:latin typeface="Arial" panose="020B0604020202020204" pitchFamily="34" charset="0"/>
+              </a:rPr>
+              <a:t>{</a:t>
+            </a:r>
+            <a:r>
+              <a:rPr lang="en-US" altLang="en-US" sz="1300" b="1">
+                <a:solidFill>
+                  <a:srgbClr val="FF0000"/>
+                </a:solidFill>
+                <a:latin typeface="Arial" panose="020B0604020202020204" pitchFamily="34" charset="0"/>
+              </a:rPr>
+              <a:t>!! </a:t>
+            </a:r>
+            <a:r>
+              <a:rPr lang="en-US" altLang="en-US" sz="1300" b="1">
+                <a:latin typeface="Arial" panose="020B0604020202020204" pitchFamily="34" charset="0"/>
+              </a:rPr>
+              <a:t>$slider-&gt;type </a:t>
+            </a:r>
+            <a:r>
+              <a:rPr lang="en-US" altLang="en-US" sz="1300" b="1">
+                <a:solidFill>
+                  <a:srgbClr val="FF0000"/>
+                </a:solidFill>
+                <a:latin typeface="Arial" panose="020B0604020202020204" pitchFamily="34" charset="0"/>
+              </a:rPr>
+              <a:t>!!</a:t>
+            </a:r>
+            <a:r>
+              <a:rPr lang="en-US" altLang="en-US" sz="1300" b="1">
+                <a:latin typeface="Arial" panose="020B0604020202020204" pitchFamily="34" charset="0"/>
+              </a:rPr>
+              <a:t>}</a:t>
+            </a:r>
+            <a:endParaRPr lang="az-Latn-AZ" altLang="en-US" sz="1300" b="1">
+              <a:latin typeface="Arial" panose="020B0604020202020204" pitchFamily="34" charset="0"/>
+            </a:endParaRPr>
+          </a:p>
+          <a:p>
+            <a:pPr marL="742950" lvl="1" indent="-285750">
+              <a:lnSpc>
+                <a:spcPct val="150000"/>
+              </a:lnSpc>
+              <a:buFont typeface="Wingdings" panose="05000000000000000000" pitchFamily="2" charset="2"/>
+              <a:buChar char="q"/>
+            </a:pPr>
+            <a:r>
+              <a:rPr lang="en-US" altLang="en-US" sz="1300" b="1">
+                <a:latin typeface="Arial" panose="020B0604020202020204" pitchFamily="34" charset="0"/>
+              </a:rPr>
+              <a:t>{</a:t>
+            </a:r>
+            <a:r>
+              <a:rPr lang="en-US" altLang="en-US" sz="1300" b="1">
+                <a:solidFill>
+                  <a:srgbClr val="FF0000"/>
+                </a:solidFill>
+                <a:latin typeface="Arial" panose="020B0604020202020204" pitchFamily="34" charset="0"/>
+              </a:rPr>
+              <a:t>{</a:t>
+            </a:r>
+            <a:r>
+              <a:rPr lang="en-US" altLang="en-US" sz="1300" b="1">
+                <a:latin typeface="Arial" panose="020B0604020202020204" pitchFamily="34" charset="0"/>
+              </a:rPr>
+              <a:t> $slider-&gt;type </a:t>
+            </a:r>
+            <a:r>
+              <a:rPr lang="en-US" altLang="en-US" sz="1300" b="1">
+                <a:solidFill>
+                  <a:srgbClr val="FF0000"/>
+                </a:solidFill>
+                <a:latin typeface="Arial" panose="020B0604020202020204" pitchFamily="34" charset="0"/>
+              </a:rPr>
+              <a:t>}</a:t>
+            </a:r>
+            <a:r>
+              <a:rPr lang="en-US" altLang="en-US" sz="1300" b="1">
+                <a:latin typeface="Arial" panose="020B0604020202020204" pitchFamily="34" charset="0"/>
+              </a:rPr>
+              <a:t>}</a:t>
+            </a:r>
+            <a:endParaRPr lang="az-Latn-AZ" altLang="en-US" sz="1300" b="1">
+              <a:latin typeface="Arial" panose="020B0604020202020204" pitchFamily="34" charset="0"/>
+            </a:endParaRPr>
+          </a:p>
+          <a:p>
+            <a:pPr>
+              <a:lnSpc>
+                <a:spcPct val="150000"/>
+              </a:lnSpc>
+              <a:buNone/>
+            </a:pPr>
+            <a:endParaRPr kumimoji="0" lang="en-US" altLang="en-US" sz="1300" b="0" i="0" u="none" strike="noStrike" cap="none" normalizeH="0" baseline="0">
+              <a:ln>
+                <a:noFill/>
+              </a:ln>
+              <a:solidFill>
+                <a:schemeClr val="tx1"/>
+              </a:solidFill>
+              <a:effectLst/>
+              <a:latin typeface="Arial" panose="020B0604020202020204" pitchFamily="34" charset="0"/>
+            </a:endParaRPr>
+          </a:p>
+          <a:p>
+            <a:pPr>
+              <a:lnSpc>
+                <a:spcPct val="150000"/>
+              </a:lnSpc>
+              <a:buNone/>
+            </a:pPr>
+            <a:r>
+              <a:rPr lang="en-US" altLang="en-US" sz="1300">
+                <a:latin typeface="Arial" panose="020B0604020202020204" pitchFamily="34" charset="0"/>
+              </a:rPr>
+              <a:t>Bu 2 </a:t>
+            </a:r>
+            <a:r>
+              <a:rPr lang="az-Latn-AZ" altLang="en-US" sz="1300">
+                <a:latin typeface="Arial" panose="020B0604020202020204" pitchFamily="34" charset="0"/>
+              </a:rPr>
+              <a:t>yazılış arasında fərq nədir ?</a:t>
+            </a:r>
+            <a:endParaRPr kumimoji="0" lang="az-Latn-AZ" altLang="en-US" sz="1300" b="0" i="0" u="none" strike="noStrike" cap="none" normalizeH="0" baseline="0">
+              <a:ln>
+                <a:noFill/>
+              </a:ln>
+              <a:solidFill>
+                <a:schemeClr val="tx1"/>
+              </a:solidFill>
+              <a:effectLst/>
+              <a:latin typeface="Arial" panose="020B0604020202020204" pitchFamily="34" charset="0"/>
+            </a:endParaRPr>
+          </a:p>
+          <a:p>
+            <a:pPr>
+              <a:lnSpc>
+                <a:spcPct val="150000"/>
+              </a:lnSpc>
+              <a:buNone/>
+            </a:pPr>
+            <a:endParaRPr kumimoji="0" lang="en-US" altLang="en-US" sz="1300" b="0" i="0" u="none" strike="noStrike" cap="none" normalizeH="0" baseline="0">
+              <a:ln>
+                <a:noFill/>
+              </a:ln>
+              <a:solidFill>
+                <a:schemeClr val="tx1"/>
+              </a:solidFill>
+              <a:effectLst/>
+              <a:latin typeface="Arial" panose="020B0604020202020204" pitchFamily="34" charset="0"/>
+            </a:endParaRPr>
+          </a:p>
+        </p:txBody>
+      </p:sp>
+      <p:pic>
+        <p:nvPicPr>
+          <p:cNvPr id="4" name="Picture 3">
+            <a:extLst>
+              <a:ext uri="{FF2B5EF4-FFF2-40B4-BE49-F238E27FC236}">
+                <a16:creationId xmlns:a16="http://schemas.microsoft.com/office/drawing/2014/main" id="{5E8196A3-FF64-2481-92DA-1F1399D15971}"/>
+              </a:ext>
+            </a:extLst>
+          </p:cNvPr>
+          <p:cNvPicPr>
+            <a:picLocks noChangeAspect="1"/>
+          </p:cNvPicPr>
+          <p:nvPr/>
+        </p:nvPicPr>
+        <p:blipFill>
+          <a:blip r:embed="rId2"/>
+          <a:stretch>
+            <a:fillRect/>
+          </a:stretch>
+        </p:blipFill>
+        <p:spPr>
+          <a:xfrm>
+            <a:off x="3897744" y="2013844"/>
+            <a:ext cx="8294255" cy="4844156"/>
+          </a:xfrm>
+          <a:prstGeom prst="rect">
+            <a:avLst/>
+          </a:prstGeom>
+        </p:spPr>
+      </p:pic>
+    </p:spTree>
+    <p:extLst>
+      <p:ext uri="{BB962C8B-B14F-4D97-AF65-F5344CB8AC3E}">
+        <p14:creationId xmlns:p14="http://schemas.microsoft.com/office/powerpoint/2010/main" val="4234886757"/>
+      </p:ext>
+    </p:extLst>
+  </p:cSld>
+  <p:clrMapOvr>
+    <a:masterClrMapping/>
+  </p:clrMapOvr>
+</p:sld>
+</file>
+
+<file path=ppt/slides/slide5.xml><?xml version="1.0" encoding="utf-8"?>
+<p:sld xmlns:a="http://schemas.openxmlformats.org/drawingml/2006/main" xmlns:r="http://schemas.openxmlformats.org/officeDocument/2006/relationships" xmlns:p="http://schemas.openxmlformats.org/presentationml/2006/main">
+  <p:cSld>
+    <p:spTree>
+      <p:nvGrpSpPr>
+        <p:cNvPr id="1" name="">
+          <a:extLst>
+            <a:ext uri="{FF2B5EF4-FFF2-40B4-BE49-F238E27FC236}">
+              <a16:creationId xmlns:a16="http://schemas.microsoft.com/office/drawing/2014/main" id="{B895A955-033B-46B2-CE9F-9D3BC2D15FAD}"/>
+            </a:ext>
+          </a:extLst>
+        </p:cNvPr>
+        <p:cNvGrpSpPr/>
+        <p:nvPr/>
+      </p:nvGrpSpPr>
+      <p:grpSpPr>
+        <a:xfrm>
+          <a:off x="0" y="0"/>
+          <a:ext cx="0" cy="0"/>
+          <a:chOff x="0" y="0"/>
+          <a:chExt cx="0" cy="0"/>
+        </a:xfrm>
+      </p:grpSpPr>
+      <p:sp>
+        <p:nvSpPr>
+          <p:cNvPr id="3" name="TextBox 2">
+            <a:extLst>
+              <a:ext uri="{FF2B5EF4-FFF2-40B4-BE49-F238E27FC236}">
+                <a16:creationId xmlns:a16="http://schemas.microsoft.com/office/drawing/2014/main" id="{C28F9434-2CBD-BE58-B818-8306F6B82754}"/>
+              </a:ext>
+            </a:extLst>
+          </p:cNvPr>
+          <p:cNvSpPr txBox="1"/>
+          <p:nvPr/>
+        </p:nvSpPr>
+        <p:spPr>
+          <a:xfrm>
+            <a:off x="217714" y="255046"/>
+            <a:ext cx="11756571" cy="3056093"/>
+          </a:xfrm>
+          <a:prstGeom prst="rect">
+            <a:avLst/>
+          </a:prstGeom>
+          <a:noFill/>
+        </p:spPr>
+        <p:txBody>
+          <a:bodyPr wrap="square">
+            <a:spAutoFit/>
+          </a:bodyPr>
+          <a:lstStyle/>
+          <a:p>
+            <a:pPr>
+              <a:lnSpc>
+                <a:spcPct val="150000"/>
+              </a:lnSpc>
+              <a:buNone/>
+            </a:pPr>
+            <a:r>
+              <a:rPr lang="en-US" altLang="en-US" sz="1300">
+                <a:latin typeface="Arial" panose="020B0604020202020204" pitchFamily="34" charset="0"/>
+              </a:rPr>
+              <a:t>1️⃣ {!! $slider-&gt;type !!}</a:t>
+            </a:r>
+          </a:p>
+          <a:p>
+            <a:pPr>
+              <a:lnSpc>
+                <a:spcPct val="150000"/>
+              </a:lnSpc>
+              <a:buNone/>
+            </a:pPr>
+            <a:endParaRPr lang="en-US" altLang="en-US" sz="1300">
+              <a:latin typeface="Arial" panose="020B0604020202020204" pitchFamily="34" charset="0"/>
+            </a:endParaRPr>
+          </a:p>
+          <a:p>
+            <a:pPr marL="742950" lvl="1" indent="-285750">
+              <a:lnSpc>
+                <a:spcPct val="150000"/>
+              </a:lnSpc>
+              <a:buFont typeface="Arial" panose="020B0604020202020204" pitchFamily="34" charset="0"/>
+              <a:buChar char="•"/>
+            </a:pPr>
+            <a:r>
+              <a:rPr lang="en-US" altLang="en-US" sz="1300">
+                <a:latin typeface="Arial" panose="020B0604020202020204" pitchFamily="34" charset="0"/>
+              </a:rPr>
+              <a:t>Escaping yoxdur → Blade dəyişənin içindəki məzmunu olduğu kimi (xam/raw) ekrana çıxarır.</a:t>
+            </a:r>
+          </a:p>
+          <a:p>
+            <a:pPr marL="742950" lvl="1" indent="-285750">
+              <a:lnSpc>
+                <a:spcPct val="150000"/>
+              </a:lnSpc>
+              <a:buFont typeface="Arial" panose="020B0604020202020204" pitchFamily="34" charset="0"/>
+              <a:buChar char="•"/>
+            </a:pPr>
+            <a:r>
+              <a:rPr lang="en-US" altLang="en-US" sz="1300">
+                <a:latin typeface="Arial" panose="020B0604020202020204" pitchFamily="34" charset="0"/>
+              </a:rPr>
+              <a:t>Əgər $slider-&gt;type içində HTML tag-lar varsa, onlar işləyəcək.</a:t>
+            </a:r>
+          </a:p>
+          <a:p>
+            <a:pPr>
+              <a:lnSpc>
+                <a:spcPct val="150000"/>
+              </a:lnSpc>
+              <a:buNone/>
+            </a:pPr>
+            <a:endParaRPr lang="en-US" altLang="en-US" sz="1300">
+              <a:latin typeface="Arial" panose="020B0604020202020204" pitchFamily="34" charset="0"/>
+            </a:endParaRPr>
+          </a:p>
+          <a:p>
+            <a:pPr>
+              <a:lnSpc>
+                <a:spcPct val="150000"/>
+              </a:lnSpc>
+              <a:buNone/>
+            </a:pPr>
+            <a:r>
+              <a:rPr lang="en-US" altLang="en-US" sz="1300">
+                <a:latin typeface="Arial" panose="020B0604020202020204" pitchFamily="34" charset="0"/>
+              </a:rPr>
+              <a:t>Məsələn:</a:t>
+            </a:r>
+          </a:p>
+          <a:p>
+            <a:pPr>
+              <a:lnSpc>
+                <a:spcPct val="150000"/>
+              </a:lnSpc>
+              <a:buNone/>
+            </a:pPr>
+            <a:endParaRPr kumimoji="0" lang="en-US" altLang="en-US" sz="1300" b="0" i="0" u="none" strike="noStrike" cap="none" normalizeH="0" baseline="0">
+              <a:ln>
+                <a:noFill/>
+              </a:ln>
+              <a:solidFill>
+                <a:schemeClr val="tx1"/>
+              </a:solidFill>
+              <a:effectLst/>
+              <a:latin typeface="Arial" panose="020B0604020202020204" pitchFamily="34" charset="0"/>
+            </a:endParaRPr>
+          </a:p>
+          <a:p>
+            <a:pPr>
+              <a:lnSpc>
+                <a:spcPct val="150000"/>
+              </a:lnSpc>
+              <a:buNone/>
+            </a:pPr>
+            <a:endParaRPr lang="en-US" altLang="en-US" sz="1300">
+              <a:latin typeface="Arial" panose="020B0604020202020204" pitchFamily="34" charset="0"/>
+            </a:endParaRPr>
+          </a:p>
+          <a:p>
+            <a:pPr>
+              <a:lnSpc>
+                <a:spcPct val="150000"/>
+              </a:lnSpc>
+              <a:buNone/>
+            </a:pPr>
+            <a:endParaRPr lang="en-US" altLang="en-US" sz="1300">
+              <a:latin typeface="Arial" panose="020B0604020202020204" pitchFamily="34" charset="0"/>
+            </a:endParaRPr>
+          </a:p>
+          <a:p>
+            <a:pPr>
+              <a:lnSpc>
+                <a:spcPct val="150000"/>
+              </a:lnSpc>
+              <a:buNone/>
+            </a:pPr>
+            <a:r>
+              <a:rPr lang="en-US" altLang="en-US" sz="1300">
+                <a:latin typeface="Arial" panose="020B0604020202020204" pitchFamily="34" charset="0"/>
+              </a:rPr>
+              <a:t>Nəticə: ⚠️ Təhlükəsizlik riski var — əgər </a:t>
+            </a:r>
+            <a:r>
+              <a:rPr lang="en-US" altLang="en-US" sz="1300" b="1">
+                <a:latin typeface="Arial" panose="020B0604020202020204" pitchFamily="34" charset="0"/>
+              </a:rPr>
+              <a:t>$slider-&gt;type </a:t>
+            </a:r>
+            <a:r>
+              <a:rPr lang="en-US" altLang="en-US" sz="1300">
+                <a:latin typeface="Arial" panose="020B0604020202020204" pitchFamily="34" charset="0"/>
+              </a:rPr>
+              <a:t>istifadəçi tərəfindən daxil edilirsə və yoxlanmırsa, </a:t>
+            </a:r>
+            <a:r>
+              <a:rPr lang="en-US" altLang="en-US" sz="1300" b="1">
+                <a:latin typeface="Arial" panose="020B0604020202020204" pitchFamily="34" charset="0"/>
+              </a:rPr>
+              <a:t>XSS</a:t>
+            </a:r>
+            <a:r>
+              <a:rPr lang="en-US" altLang="en-US" sz="1300">
+                <a:latin typeface="Arial" panose="020B0604020202020204" pitchFamily="34" charset="0"/>
+              </a:rPr>
+              <a:t> hücumlarına səbəb ola bilər.</a:t>
+            </a:r>
+            <a:endParaRPr kumimoji="0" lang="en-US" altLang="en-US" sz="1300" b="0" i="0" u="none" strike="noStrike" cap="none" normalizeH="0" baseline="0">
+              <a:ln>
+                <a:noFill/>
+              </a:ln>
+              <a:solidFill>
+                <a:schemeClr val="tx1"/>
+              </a:solidFill>
+              <a:effectLst/>
+              <a:latin typeface="Arial" panose="020B0604020202020204" pitchFamily="34" charset="0"/>
+            </a:endParaRPr>
+          </a:p>
+        </p:txBody>
+      </p:sp>
+      <p:pic>
+        <p:nvPicPr>
+          <p:cNvPr id="4" name="Picture 3">
+            <a:extLst>
+              <a:ext uri="{FF2B5EF4-FFF2-40B4-BE49-F238E27FC236}">
+                <a16:creationId xmlns:a16="http://schemas.microsoft.com/office/drawing/2014/main" id="{D65D1743-F4AF-E12E-823C-2407025F46C9}"/>
+              </a:ext>
+            </a:extLst>
+          </p:cNvPr>
+          <p:cNvPicPr>
+            <a:picLocks noChangeAspect="1"/>
+          </p:cNvPicPr>
+          <p:nvPr/>
+        </p:nvPicPr>
+        <p:blipFill>
+          <a:blip r:embed="rId2"/>
+          <a:stretch>
+            <a:fillRect/>
+          </a:stretch>
+        </p:blipFill>
+        <p:spPr>
+          <a:xfrm>
+            <a:off x="0" y="2181635"/>
+            <a:ext cx="2848373" cy="333422"/>
+          </a:xfrm>
+          <a:prstGeom prst="rect">
+            <a:avLst/>
+          </a:prstGeom>
+        </p:spPr>
+      </p:pic>
+      <p:pic>
+        <p:nvPicPr>
+          <p:cNvPr id="6" name="Picture 5">
+            <a:extLst>
+              <a:ext uri="{FF2B5EF4-FFF2-40B4-BE49-F238E27FC236}">
+                <a16:creationId xmlns:a16="http://schemas.microsoft.com/office/drawing/2014/main" id="{1E7BE485-B477-A157-40C4-8B8B138EA42A}"/>
+              </a:ext>
+            </a:extLst>
+          </p:cNvPr>
+          <p:cNvPicPr>
+            <a:picLocks noChangeAspect="1"/>
+          </p:cNvPicPr>
+          <p:nvPr/>
+        </p:nvPicPr>
+        <p:blipFill>
+          <a:blip r:embed="rId3"/>
+          <a:stretch>
+            <a:fillRect/>
+          </a:stretch>
+        </p:blipFill>
+        <p:spPr>
+          <a:xfrm>
+            <a:off x="0" y="3342046"/>
+            <a:ext cx="4382112" cy="409632"/>
+          </a:xfrm>
+          <a:prstGeom prst="rect">
+            <a:avLst/>
+          </a:prstGeom>
+        </p:spPr>
+      </p:pic>
+    </p:spTree>
+    <p:extLst>
+      <p:ext uri="{BB962C8B-B14F-4D97-AF65-F5344CB8AC3E}">
+        <p14:creationId xmlns:p14="http://schemas.microsoft.com/office/powerpoint/2010/main" val="1039898443"/>
+      </p:ext>
+    </p:extLst>
+  </p:cSld>
+  <p:clrMapOvr>
+    <a:masterClrMapping/>
+  </p:clrMapOvr>
+</p:sld>
+</file>
+
+<file path=ppt/slides/slide6.xml><?xml version="1.0" encoding="utf-8"?>
+<p:sld xmlns:a="http://schemas.openxmlformats.org/drawingml/2006/main" xmlns:r="http://schemas.openxmlformats.org/officeDocument/2006/relationships" xmlns:p="http://schemas.openxmlformats.org/presentationml/2006/main">
+  <p:cSld>
+    <p:spTree>
+      <p:nvGrpSpPr>
+        <p:cNvPr id="1" name="">
+          <a:extLst>
+            <a:ext uri="{FF2B5EF4-FFF2-40B4-BE49-F238E27FC236}">
+              <a16:creationId xmlns:a16="http://schemas.microsoft.com/office/drawing/2014/main" id="{007E473F-3DCE-64F1-0048-E667C0BF2A19}"/>
+            </a:ext>
+          </a:extLst>
+        </p:cNvPr>
+        <p:cNvGrpSpPr/>
+        <p:nvPr/>
+      </p:nvGrpSpPr>
+      <p:grpSpPr>
+        <a:xfrm>
+          <a:off x="0" y="0"/>
+          <a:ext cx="0" cy="0"/>
+          <a:chOff x="0" y="0"/>
+          <a:chExt cx="0" cy="0"/>
+        </a:xfrm>
+      </p:grpSpPr>
+      <p:sp>
+        <p:nvSpPr>
+          <p:cNvPr id="3" name="TextBox 2">
+            <a:extLst>
+              <a:ext uri="{FF2B5EF4-FFF2-40B4-BE49-F238E27FC236}">
+                <a16:creationId xmlns:a16="http://schemas.microsoft.com/office/drawing/2014/main" id="{F35194C0-23E8-36D6-777F-B08FF131F8A0}"/>
+              </a:ext>
+            </a:extLst>
+          </p:cNvPr>
+          <p:cNvSpPr txBox="1"/>
+          <p:nvPr/>
+        </p:nvSpPr>
+        <p:spPr>
+          <a:xfrm>
+            <a:off x="217714" y="255046"/>
+            <a:ext cx="11756571" cy="3056093"/>
+          </a:xfrm>
+          <a:prstGeom prst="rect">
+            <a:avLst/>
+          </a:prstGeom>
+          <a:noFill/>
+        </p:spPr>
+        <p:txBody>
+          <a:bodyPr wrap="square">
+            <a:spAutoFit/>
+          </a:bodyPr>
+          <a:lstStyle/>
+          <a:p>
+            <a:pPr>
+              <a:lnSpc>
+                <a:spcPct val="150000"/>
+              </a:lnSpc>
+              <a:buNone/>
+            </a:pPr>
+            <a:r>
+              <a:rPr lang="en-US" altLang="en-US" sz="1300">
+                <a:latin typeface="Arial" panose="020B0604020202020204" pitchFamily="34" charset="0"/>
+              </a:rPr>
+              <a:t>2️⃣ {{ $slider-&gt;type }}</a:t>
+            </a:r>
+          </a:p>
+          <a:p>
+            <a:pPr>
+              <a:lnSpc>
+                <a:spcPct val="150000"/>
+              </a:lnSpc>
+              <a:buNone/>
+            </a:pPr>
+            <a:endParaRPr lang="en-US" altLang="en-US" sz="1300">
+              <a:latin typeface="Arial" panose="020B0604020202020204" pitchFamily="34" charset="0"/>
+            </a:endParaRPr>
+          </a:p>
+          <a:p>
+            <a:pPr marL="742950" lvl="1" indent="-285750">
+              <a:lnSpc>
+                <a:spcPct val="150000"/>
+              </a:lnSpc>
+              <a:buFont typeface="Arial" panose="020B0604020202020204" pitchFamily="34" charset="0"/>
+              <a:buChar char="•"/>
+            </a:pPr>
+            <a:r>
+              <a:rPr lang="en-US" altLang="en-US" sz="1300">
+                <a:latin typeface="Arial" panose="020B0604020202020204" pitchFamily="34" charset="0"/>
+              </a:rPr>
+              <a:t>Laravel avtomatik escape edir → yəni HTML special simvollarını (&lt;, &gt;, &amp;, ") kodlaşdırır.</a:t>
+            </a:r>
+          </a:p>
+          <a:p>
+            <a:pPr>
+              <a:lnSpc>
+                <a:spcPct val="150000"/>
+              </a:lnSpc>
+              <a:buNone/>
+            </a:pPr>
+            <a:endParaRPr lang="en-US" altLang="en-US" sz="1300">
+              <a:latin typeface="Arial" panose="020B0604020202020204" pitchFamily="34" charset="0"/>
+            </a:endParaRPr>
+          </a:p>
+          <a:p>
+            <a:pPr>
+              <a:lnSpc>
+                <a:spcPct val="150000"/>
+              </a:lnSpc>
+              <a:buNone/>
+            </a:pPr>
+            <a:r>
+              <a:rPr lang="en-US" altLang="en-US" sz="1300">
+                <a:latin typeface="Arial" panose="020B0604020202020204" pitchFamily="34" charset="0"/>
+              </a:rPr>
+              <a:t>Eyni nümunədə:</a:t>
+            </a:r>
+          </a:p>
+          <a:p>
+            <a:pPr>
+              <a:lnSpc>
+                <a:spcPct val="150000"/>
+              </a:lnSpc>
+              <a:buNone/>
+            </a:pPr>
+            <a:endParaRPr kumimoji="0" lang="en-US" altLang="en-US" sz="1300" b="0" i="0" u="none" strike="noStrike" cap="none" normalizeH="0" baseline="0">
+              <a:ln>
+                <a:noFill/>
+              </a:ln>
+              <a:solidFill>
+                <a:schemeClr val="tx1"/>
+              </a:solidFill>
+              <a:effectLst/>
+              <a:latin typeface="Arial" panose="020B0604020202020204" pitchFamily="34" charset="0"/>
+            </a:endParaRPr>
+          </a:p>
+          <a:p>
+            <a:pPr>
+              <a:lnSpc>
+                <a:spcPct val="150000"/>
+              </a:lnSpc>
+              <a:buNone/>
+            </a:pPr>
+            <a:endParaRPr lang="en-US" altLang="en-US" sz="1300">
+              <a:latin typeface="Arial" panose="020B0604020202020204" pitchFamily="34" charset="0"/>
+            </a:endParaRPr>
+          </a:p>
+          <a:p>
+            <a:pPr>
+              <a:lnSpc>
+                <a:spcPct val="150000"/>
+              </a:lnSpc>
+              <a:buNone/>
+            </a:pPr>
+            <a:endParaRPr kumimoji="0" lang="en-US" altLang="en-US" sz="1300" b="0" i="0" u="none" strike="noStrike" cap="none" normalizeH="0" baseline="0">
+              <a:ln>
+                <a:noFill/>
+              </a:ln>
+              <a:solidFill>
+                <a:schemeClr val="tx1"/>
+              </a:solidFill>
+              <a:effectLst/>
+              <a:latin typeface="Arial" panose="020B0604020202020204" pitchFamily="34" charset="0"/>
+            </a:endParaRPr>
+          </a:p>
+          <a:p>
+            <a:pPr>
+              <a:lnSpc>
+                <a:spcPct val="150000"/>
+              </a:lnSpc>
+              <a:buNone/>
+            </a:pPr>
+            <a:endParaRPr kumimoji="0" lang="en-US" altLang="en-US" sz="1300" b="0" i="0" u="none" strike="noStrike" cap="none" normalizeH="0" baseline="0">
+              <a:ln>
+                <a:noFill/>
+              </a:ln>
+              <a:solidFill>
+                <a:schemeClr val="tx1"/>
+              </a:solidFill>
+              <a:effectLst/>
+              <a:latin typeface="Arial" panose="020B0604020202020204" pitchFamily="34" charset="0"/>
+            </a:endParaRPr>
+          </a:p>
+          <a:p>
+            <a:pPr>
+              <a:lnSpc>
+                <a:spcPct val="150000"/>
+              </a:lnSpc>
+              <a:buNone/>
+            </a:pPr>
+            <a:r>
+              <a:rPr lang="en-US" altLang="en-US" sz="1300">
+                <a:latin typeface="Arial" panose="020B0604020202020204" pitchFamily="34" charset="0"/>
+              </a:rPr>
+              <a:t>Nəticə: Bu, təhlükəsizdir və XSS riskini minimuma endirir.</a:t>
+            </a:r>
+            <a:endParaRPr kumimoji="0" lang="en-US" altLang="en-US" sz="1300" b="0" i="0" u="none" strike="noStrike" cap="none" normalizeH="0" baseline="0">
+              <a:ln>
+                <a:noFill/>
+              </a:ln>
+              <a:solidFill>
+                <a:schemeClr val="tx1"/>
+              </a:solidFill>
+              <a:effectLst/>
+              <a:latin typeface="Arial" panose="020B0604020202020204" pitchFamily="34" charset="0"/>
+            </a:endParaRPr>
+          </a:p>
+        </p:txBody>
+      </p:sp>
+      <p:pic>
+        <p:nvPicPr>
+          <p:cNvPr id="4" name="Picture 3">
+            <a:extLst>
+              <a:ext uri="{FF2B5EF4-FFF2-40B4-BE49-F238E27FC236}">
+                <a16:creationId xmlns:a16="http://schemas.microsoft.com/office/drawing/2014/main" id="{8B0E88B3-62CA-E1E1-CFD1-CD93D7D3DB77}"/>
+              </a:ext>
+            </a:extLst>
+          </p:cNvPr>
+          <p:cNvPicPr>
+            <a:picLocks noChangeAspect="1"/>
+          </p:cNvPicPr>
+          <p:nvPr/>
+        </p:nvPicPr>
+        <p:blipFill>
+          <a:blip r:embed="rId2"/>
+          <a:stretch>
+            <a:fillRect/>
+          </a:stretch>
+        </p:blipFill>
+        <p:spPr>
+          <a:xfrm>
+            <a:off x="0" y="1889385"/>
+            <a:ext cx="2934109" cy="419158"/>
+          </a:xfrm>
+          <a:prstGeom prst="rect">
+            <a:avLst/>
+          </a:prstGeom>
+        </p:spPr>
+      </p:pic>
+      <p:pic>
+        <p:nvPicPr>
+          <p:cNvPr id="6" name="Picture 5">
+            <a:extLst>
+              <a:ext uri="{FF2B5EF4-FFF2-40B4-BE49-F238E27FC236}">
+                <a16:creationId xmlns:a16="http://schemas.microsoft.com/office/drawing/2014/main" id="{304407B2-3BE0-B7E2-CC9A-EBC7FD95D7BA}"/>
+              </a:ext>
+            </a:extLst>
+          </p:cNvPr>
+          <p:cNvPicPr>
+            <a:picLocks noChangeAspect="1"/>
+          </p:cNvPicPr>
+          <p:nvPr/>
+        </p:nvPicPr>
+        <p:blipFill>
+          <a:blip r:embed="rId3"/>
+          <a:stretch>
+            <a:fillRect/>
+          </a:stretch>
+        </p:blipFill>
+        <p:spPr>
+          <a:xfrm>
+            <a:off x="0" y="3346809"/>
+            <a:ext cx="6039693" cy="400106"/>
+          </a:xfrm>
+          <a:prstGeom prst="rect">
+            <a:avLst/>
+          </a:prstGeom>
+        </p:spPr>
+      </p:pic>
+    </p:spTree>
+    <p:extLst>
+      <p:ext uri="{BB962C8B-B14F-4D97-AF65-F5344CB8AC3E}">
+        <p14:creationId xmlns:p14="http://schemas.microsoft.com/office/powerpoint/2010/main" val="3360324939"/>
+      </p:ext>
+    </p:extLst>
+  </p:cSld>
+  <p:clrMapOvr>
+    <a:masterClrMapping/>
+  </p:clrMapOvr>
+</p:sld>
+</file>
+
+<file path=ppt/slides/slide7.xml><?xml version="1.0" encoding="utf-8"?>
+<p:sld xmlns:a="http://schemas.openxmlformats.org/drawingml/2006/main" xmlns:r="http://schemas.openxmlformats.org/officeDocument/2006/relationships" xmlns:p="http://schemas.openxmlformats.org/presentationml/2006/main">
+  <p:cSld>
+    <p:spTree>
+      <p:nvGrpSpPr>
+        <p:cNvPr id="1" name="">
+          <a:extLst>
+            <a:ext uri="{FF2B5EF4-FFF2-40B4-BE49-F238E27FC236}">
+              <a16:creationId xmlns:a16="http://schemas.microsoft.com/office/drawing/2014/main" id="{515BE056-F87F-A5EA-BB3E-3B74C0FA2C0E}"/>
+            </a:ext>
+          </a:extLst>
+        </p:cNvPr>
+        <p:cNvGrpSpPr/>
+        <p:nvPr/>
+      </p:nvGrpSpPr>
+      <p:grpSpPr>
+        <a:xfrm>
+          <a:off x="0" y="0"/>
+          <a:ext cx="0" cy="0"/>
+          <a:chOff x="0" y="0"/>
+          <a:chExt cx="0" cy="0"/>
+        </a:xfrm>
+      </p:grpSpPr>
+      <p:sp>
+        <p:nvSpPr>
+          <p:cNvPr id="3" name="TextBox 2">
+            <a:extLst>
+              <a:ext uri="{FF2B5EF4-FFF2-40B4-BE49-F238E27FC236}">
+                <a16:creationId xmlns:a16="http://schemas.microsoft.com/office/drawing/2014/main" id="{3BE3A256-F923-1B6C-CF2E-10B023B28FA7}"/>
+              </a:ext>
+            </a:extLst>
+          </p:cNvPr>
+          <p:cNvSpPr txBox="1"/>
+          <p:nvPr/>
+        </p:nvSpPr>
+        <p:spPr>
+          <a:xfrm>
+            <a:off x="217714" y="255046"/>
+            <a:ext cx="11756571" cy="3956339"/>
+          </a:xfrm>
+          <a:prstGeom prst="rect">
+            <a:avLst/>
+          </a:prstGeom>
+          <a:noFill/>
+        </p:spPr>
+        <p:txBody>
+          <a:bodyPr wrap="square">
+            <a:spAutoFit/>
+          </a:bodyPr>
+          <a:lstStyle/>
+          <a:p>
+            <a:pPr>
+              <a:lnSpc>
+                <a:spcPct val="150000"/>
+              </a:lnSpc>
+              <a:buNone/>
+            </a:pPr>
+            <a:r>
+              <a:rPr lang="en-US" altLang="en-US" sz="1300">
+                <a:latin typeface="Arial" panose="020B0604020202020204" pitchFamily="34" charset="0"/>
+              </a:rPr>
+              <a:t>Laravel-də həm </a:t>
+            </a:r>
+            <a:r>
+              <a:rPr lang="en-US" altLang="en-US" sz="1300" b="1">
+                <a:latin typeface="Arial" panose="020B0604020202020204" pitchFamily="34" charset="0"/>
+              </a:rPr>
+              <a:t>HTML</a:t>
+            </a:r>
+            <a:r>
+              <a:rPr lang="en-US" altLang="en-US" sz="1300">
+                <a:latin typeface="Arial" panose="020B0604020202020204" pitchFamily="34" charset="0"/>
+              </a:rPr>
+              <a:t> </a:t>
+            </a:r>
+            <a:r>
+              <a:rPr lang="en-US" altLang="en-US" sz="1300" b="1">
+                <a:latin typeface="Arial" panose="020B0604020202020204" pitchFamily="34" charset="0"/>
+              </a:rPr>
+              <a:t>tag</a:t>
+            </a:r>
+            <a:r>
+              <a:rPr lang="en-US" altLang="en-US" sz="1300">
+                <a:latin typeface="Arial" panose="020B0604020202020204" pitchFamily="34" charset="0"/>
+              </a:rPr>
+              <a:t>-ları işlətmək, həm də </a:t>
+            </a:r>
+            <a:r>
+              <a:rPr lang="en-US" altLang="en-US" sz="1300" b="1">
+                <a:latin typeface="Arial" panose="020B0604020202020204" pitchFamily="34" charset="0"/>
+              </a:rPr>
+              <a:t>XSS</a:t>
+            </a:r>
+            <a:r>
+              <a:rPr lang="en-US" altLang="en-US" sz="1300">
+                <a:latin typeface="Arial" panose="020B0604020202020204" pitchFamily="34" charset="0"/>
+              </a:rPr>
+              <a:t>-dən qorunmaq üçün biz PHP-nin </a:t>
+            </a:r>
+            <a:r>
+              <a:rPr lang="en-US" altLang="en-US" sz="1300" b="1">
+                <a:solidFill>
+                  <a:srgbClr val="FF0000"/>
+                </a:solidFill>
+                <a:latin typeface="Arial" panose="020B0604020202020204" pitchFamily="34" charset="0"/>
+              </a:rPr>
+              <a:t>strip_tags() </a:t>
+            </a:r>
+            <a:r>
+              <a:rPr lang="en-US" altLang="en-US" sz="1300">
+                <a:latin typeface="Arial" panose="020B0604020202020204" pitchFamily="34" charset="0"/>
+              </a:rPr>
+              <a:t>funksiyasını istifadə edərək yalnız istədiyimiz tag-lara icazə verə bilərik.</a:t>
+            </a:r>
+          </a:p>
+          <a:p>
+            <a:pPr>
+              <a:lnSpc>
+                <a:spcPct val="150000"/>
+              </a:lnSpc>
+              <a:buNone/>
+            </a:pPr>
+            <a:endParaRPr kumimoji="0" lang="en-US" altLang="en-US" sz="1300" b="0" i="0" u="none" strike="noStrike" cap="none" normalizeH="0" baseline="0">
+              <a:ln>
+                <a:noFill/>
+              </a:ln>
+              <a:solidFill>
+                <a:schemeClr val="tx1"/>
+              </a:solidFill>
+              <a:effectLst/>
+              <a:latin typeface="Arial" panose="020B0604020202020204" pitchFamily="34" charset="0"/>
+            </a:endParaRPr>
+          </a:p>
+          <a:p>
+            <a:pPr>
+              <a:lnSpc>
+                <a:spcPct val="150000"/>
+              </a:lnSpc>
+              <a:buNone/>
+            </a:pPr>
+            <a:r>
+              <a:rPr lang="en-US" altLang="en-US" sz="1300">
+                <a:latin typeface="Arial" panose="020B0604020202020204" pitchFamily="34" charset="0"/>
+              </a:rPr>
+              <a:t>Misal:</a:t>
+            </a:r>
+          </a:p>
+          <a:p>
+            <a:pPr>
+              <a:lnSpc>
+                <a:spcPct val="150000"/>
+              </a:lnSpc>
+              <a:buNone/>
+            </a:pPr>
+            <a:endParaRPr kumimoji="0" lang="en-US" altLang="en-US" sz="1300" b="0" i="0" u="none" strike="noStrike" cap="none" normalizeH="0" baseline="0">
+              <a:ln>
+                <a:noFill/>
+              </a:ln>
+              <a:solidFill>
+                <a:schemeClr val="tx1"/>
+              </a:solidFill>
+              <a:effectLst/>
+              <a:latin typeface="Arial" panose="020B0604020202020204" pitchFamily="34" charset="0"/>
+            </a:endParaRPr>
+          </a:p>
+          <a:p>
+            <a:pPr>
+              <a:lnSpc>
+                <a:spcPct val="150000"/>
+              </a:lnSpc>
+              <a:buNone/>
+            </a:pPr>
+            <a:endParaRPr lang="en-US" altLang="en-US" sz="1300">
+              <a:latin typeface="Arial" panose="020B0604020202020204" pitchFamily="34" charset="0"/>
+            </a:endParaRPr>
+          </a:p>
+          <a:p>
+            <a:pPr>
+              <a:lnSpc>
+                <a:spcPct val="150000"/>
+              </a:lnSpc>
+              <a:buNone/>
+            </a:pPr>
+            <a:endParaRPr kumimoji="0" lang="en-US" altLang="en-US" sz="1300" b="0" i="0" u="none" strike="noStrike" cap="none" normalizeH="0" baseline="0">
+              <a:ln>
+                <a:noFill/>
+              </a:ln>
+              <a:solidFill>
+                <a:schemeClr val="tx1"/>
+              </a:solidFill>
+              <a:effectLst/>
+              <a:latin typeface="Arial" panose="020B0604020202020204" pitchFamily="34" charset="0"/>
+            </a:endParaRPr>
+          </a:p>
+          <a:p>
+            <a:pPr>
+              <a:lnSpc>
+                <a:spcPct val="150000"/>
+              </a:lnSpc>
+              <a:buNone/>
+            </a:pPr>
+            <a:r>
+              <a:rPr lang="en-US" altLang="en-US" sz="1300" b="1">
+                <a:latin typeface="Arial" panose="020B0604020202020204" pitchFamily="34" charset="0"/>
+              </a:rPr>
+              <a:t>Bu kodda</a:t>
+            </a:r>
+            <a:r>
+              <a:rPr lang="en-US" altLang="en-US" sz="1300">
+                <a:latin typeface="Arial" panose="020B0604020202020204" pitchFamily="34" charset="0"/>
+              </a:rPr>
+              <a:t>:</a:t>
+            </a:r>
+          </a:p>
+          <a:p>
+            <a:pPr marL="742950" lvl="1" indent="-285750">
+              <a:lnSpc>
+                <a:spcPct val="150000"/>
+              </a:lnSpc>
+              <a:buFont typeface="Wingdings" panose="05000000000000000000" pitchFamily="2" charset="2"/>
+              <a:buChar char="q"/>
+            </a:pPr>
+            <a:r>
+              <a:rPr lang="en-US" altLang="en-US" sz="1300">
+                <a:latin typeface="Arial" panose="020B0604020202020204" pitchFamily="34" charset="0"/>
+              </a:rPr>
+              <a:t>$slider-&gt;type içindəki məzmun göstərilir.</a:t>
+            </a:r>
+          </a:p>
+          <a:p>
+            <a:pPr marL="742950" lvl="1" indent="-285750">
+              <a:lnSpc>
+                <a:spcPct val="150000"/>
+              </a:lnSpc>
+              <a:buFont typeface="Wingdings" panose="05000000000000000000" pitchFamily="2" charset="2"/>
+              <a:buChar char="q"/>
+            </a:pPr>
+            <a:r>
+              <a:rPr lang="en-US" altLang="en-US" sz="1300">
+                <a:latin typeface="Arial" panose="020B0604020202020204" pitchFamily="34" charset="0"/>
+              </a:rPr>
+              <a:t>HTML tag-lar yalnız &lt;b&gt;, &lt;i&gt;, &lt;u&gt;, &lt;strong&gt;, &lt;em&gt;, &lt;span&gt; icazə verilənlər siyahısındadır.</a:t>
+            </a:r>
+          </a:p>
+          <a:p>
+            <a:pPr marL="742950" lvl="1" indent="-285750">
+              <a:lnSpc>
+                <a:spcPct val="150000"/>
+              </a:lnSpc>
+              <a:buFont typeface="Wingdings" panose="05000000000000000000" pitchFamily="2" charset="2"/>
+              <a:buChar char="q"/>
+            </a:pPr>
+            <a:r>
+              <a:rPr lang="en-US" altLang="en-US" sz="1300">
+                <a:latin typeface="Arial" panose="020B0604020202020204" pitchFamily="34" charset="0"/>
+              </a:rPr>
+              <a:t>Qalan bütün HTML tag-lar (&lt;script&gt;, &lt;iframe&gt; və s.) avtomatik silinir, yəni XSS riskini azaldır.</a:t>
+            </a:r>
+          </a:p>
+          <a:p>
+            <a:pPr>
+              <a:lnSpc>
+                <a:spcPct val="150000"/>
+              </a:lnSpc>
+              <a:buNone/>
+            </a:pPr>
+            <a:endParaRPr kumimoji="0" lang="en-US" altLang="en-US" sz="1300" b="0" i="0" u="none" strike="noStrike" cap="none" normalizeH="0" baseline="0">
+              <a:ln>
+                <a:noFill/>
+              </a:ln>
+              <a:solidFill>
+                <a:schemeClr val="tx1"/>
+              </a:solidFill>
+              <a:effectLst/>
+              <a:latin typeface="Arial" panose="020B0604020202020204" pitchFamily="34" charset="0"/>
+            </a:endParaRPr>
+          </a:p>
+          <a:p>
+            <a:pPr>
+              <a:lnSpc>
+                <a:spcPct val="150000"/>
+              </a:lnSpc>
+              <a:buNone/>
+            </a:pPr>
+            <a:endParaRPr kumimoji="0" lang="en-US" altLang="en-US" sz="1300" b="0" i="0" u="none" strike="noStrike" cap="none" normalizeH="0" baseline="0">
+              <a:ln>
+                <a:noFill/>
+              </a:ln>
+              <a:solidFill>
+                <a:schemeClr val="tx1"/>
+              </a:solidFill>
+              <a:effectLst/>
+              <a:latin typeface="Arial" panose="020B0604020202020204" pitchFamily="34" charset="0"/>
+            </a:endParaRPr>
+          </a:p>
+        </p:txBody>
+      </p:sp>
+      <p:pic>
+        <p:nvPicPr>
+          <p:cNvPr id="4" name="Picture 3">
+            <a:extLst>
+              <a:ext uri="{FF2B5EF4-FFF2-40B4-BE49-F238E27FC236}">
+                <a16:creationId xmlns:a16="http://schemas.microsoft.com/office/drawing/2014/main" id="{1BCE8269-834C-F1A7-3F58-DD093B6613E6}"/>
+              </a:ext>
+            </a:extLst>
+          </p:cNvPr>
+          <p:cNvPicPr>
+            <a:picLocks noChangeAspect="1"/>
+          </p:cNvPicPr>
+          <p:nvPr/>
+        </p:nvPicPr>
+        <p:blipFill>
+          <a:blip r:embed="rId2"/>
+          <a:stretch>
+            <a:fillRect/>
+          </a:stretch>
+        </p:blipFill>
+        <p:spPr>
+          <a:xfrm>
+            <a:off x="0" y="1578661"/>
+            <a:ext cx="5677692" cy="504895"/>
+          </a:xfrm>
+          <a:prstGeom prst="rect">
+            <a:avLst/>
+          </a:prstGeom>
+        </p:spPr>
+      </p:pic>
+    </p:spTree>
+    <p:extLst>
+      <p:ext uri="{BB962C8B-B14F-4D97-AF65-F5344CB8AC3E}">
+        <p14:creationId xmlns:p14="http://schemas.microsoft.com/office/powerpoint/2010/main" val="3037095527"/>
+      </p:ext>
+    </p:extLst>
+  </p:cSld>
+  <p:clrMapOvr>
+    <a:masterClrMapping/>
+  </p:clrMapOvr>
+</p:sld>
+</file>
+
+<file path=ppt/slides/slide8.xml><?xml version="1.0" encoding="utf-8"?>
+<p:sld xmlns:a="http://schemas.openxmlformats.org/drawingml/2006/main" xmlns:r="http://schemas.openxmlformats.org/officeDocument/2006/relationships" xmlns:p="http://schemas.openxmlformats.org/presentationml/2006/main">
+  <p:cSld>
+    <p:spTree>
+      <p:nvGrpSpPr>
+        <p:cNvPr id="1" name="">
+          <a:extLst>
+            <a:ext uri="{FF2B5EF4-FFF2-40B4-BE49-F238E27FC236}">
+              <a16:creationId xmlns:a16="http://schemas.microsoft.com/office/drawing/2014/main" id="{816F949A-976A-93A0-16C0-875F96D4FA97}"/>
+            </a:ext>
+          </a:extLst>
+        </p:cNvPr>
+        <p:cNvGrpSpPr/>
+        <p:nvPr/>
+      </p:nvGrpSpPr>
+      <p:grpSpPr>
+        <a:xfrm>
+          <a:off x="0" y="0"/>
+          <a:ext cx="0" cy="0"/>
+          <a:chOff x="0" y="0"/>
+          <a:chExt cx="0" cy="0"/>
+        </a:xfrm>
+      </p:grpSpPr>
+      <p:sp>
+        <p:nvSpPr>
+          <p:cNvPr id="3" name="TextBox 2">
+            <a:extLst>
+              <a:ext uri="{FF2B5EF4-FFF2-40B4-BE49-F238E27FC236}">
+                <a16:creationId xmlns:a16="http://schemas.microsoft.com/office/drawing/2014/main" id="{90679230-3A7D-A442-52E8-8DC49708820D}"/>
+              </a:ext>
+            </a:extLst>
+          </p:cNvPr>
+          <p:cNvSpPr txBox="1"/>
+          <p:nvPr/>
+        </p:nvSpPr>
+        <p:spPr>
+          <a:xfrm>
+            <a:off x="217714" y="255046"/>
+            <a:ext cx="11756571" cy="4856586"/>
+          </a:xfrm>
+          <a:prstGeom prst="rect">
+            <a:avLst/>
+          </a:prstGeom>
+          <a:noFill/>
+        </p:spPr>
+        <p:txBody>
+          <a:bodyPr wrap="square">
+            <a:spAutoFit/>
+          </a:bodyPr>
+          <a:lstStyle/>
+          <a:p>
+            <a:pPr>
+              <a:lnSpc>
+                <a:spcPct val="150000"/>
+              </a:lnSpc>
+              <a:buNone/>
+            </a:pPr>
+            <a:r>
+              <a:rPr lang="en-US" altLang="en-US" sz="1300">
+                <a:latin typeface="Arial" panose="020B0604020202020204" pitchFamily="34" charset="0"/>
+              </a:rPr>
+              <a:t>Əgər bu işi tez-tez edəcəksənsə, bir helper funksiyası yaza bilərsən:  </a:t>
+            </a:r>
+            <a:r>
+              <a:rPr lang="en-US" altLang="en-US" sz="1300" b="1">
+                <a:solidFill>
+                  <a:srgbClr val="FF0000"/>
+                </a:solidFill>
+                <a:latin typeface="Arial" panose="020B0604020202020204" pitchFamily="34" charset="0"/>
+              </a:rPr>
+              <a:t>app/helpers.php</a:t>
+            </a:r>
+          </a:p>
+          <a:p>
+            <a:pPr>
+              <a:lnSpc>
+                <a:spcPct val="150000"/>
+              </a:lnSpc>
+              <a:buNone/>
+            </a:pPr>
+            <a:endParaRPr kumimoji="0" lang="en-US" altLang="en-US" sz="1300" b="0" i="0" u="none" strike="noStrike" cap="none" normalizeH="0" baseline="0">
+              <a:ln>
+                <a:noFill/>
+              </a:ln>
+              <a:solidFill>
+                <a:schemeClr val="tx1"/>
+              </a:solidFill>
+              <a:effectLst/>
+              <a:latin typeface="Arial" panose="020B0604020202020204" pitchFamily="34" charset="0"/>
+            </a:endParaRPr>
+          </a:p>
+          <a:p>
+            <a:pPr>
+              <a:lnSpc>
+                <a:spcPct val="150000"/>
+              </a:lnSpc>
+              <a:buNone/>
+            </a:pPr>
+            <a:endParaRPr lang="en-US" altLang="en-US" sz="1300">
+              <a:latin typeface="Arial" panose="020B0604020202020204" pitchFamily="34" charset="0"/>
+            </a:endParaRPr>
+          </a:p>
+          <a:p>
+            <a:pPr>
+              <a:lnSpc>
+                <a:spcPct val="150000"/>
+              </a:lnSpc>
+              <a:buNone/>
+            </a:pPr>
+            <a:endParaRPr kumimoji="0" lang="en-US" altLang="en-US" sz="1300" b="0" i="0" u="none" strike="noStrike" cap="none" normalizeH="0" baseline="0">
+              <a:ln>
+                <a:noFill/>
+              </a:ln>
+              <a:solidFill>
+                <a:schemeClr val="tx1"/>
+              </a:solidFill>
+              <a:effectLst/>
+              <a:latin typeface="Arial" panose="020B0604020202020204" pitchFamily="34" charset="0"/>
+            </a:endParaRPr>
+          </a:p>
+          <a:p>
+            <a:pPr>
+              <a:lnSpc>
+                <a:spcPct val="150000"/>
+              </a:lnSpc>
+              <a:buNone/>
+            </a:pPr>
+            <a:endParaRPr lang="en-US" altLang="en-US" sz="1300">
+              <a:latin typeface="Arial" panose="020B0604020202020204" pitchFamily="34" charset="0"/>
+            </a:endParaRPr>
+          </a:p>
+          <a:p>
+            <a:pPr>
+              <a:lnSpc>
+                <a:spcPct val="150000"/>
+              </a:lnSpc>
+              <a:buNone/>
+            </a:pPr>
+            <a:endParaRPr kumimoji="0" lang="en-US" altLang="en-US" sz="1300" b="0" i="0" u="none" strike="noStrike" cap="none" normalizeH="0" baseline="0">
+              <a:ln>
+                <a:noFill/>
+              </a:ln>
+              <a:solidFill>
+                <a:schemeClr val="tx1"/>
+              </a:solidFill>
+              <a:effectLst/>
+              <a:latin typeface="Arial" panose="020B0604020202020204" pitchFamily="34" charset="0"/>
+            </a:endParaRPr>
+          </a:p>
+          <a:p>
+            <a:pPr>
+              <a:lnSpc>
+                <a:spcPct val="150000"/>
+              </a:lnSpc>
+              <a:buNone/>
+            </a:pPr>
+            <a:endParaRPr lang="en-US" altLang="en-US" sz="1300">
+              <a:latin typeface="Arial" panose="020B0604020202020204" pitchFamily="34" charset="0"/>
+            </a:endParaRPr>
+          </a:p>
+          <a:p>
+            <a:pPr>
+              <a:lnSpc>
+                <a:spcPct val="150000"/>
+              </a:lnSpc>
+              <a:buNone/>
+            </a:pPr>
+            <a:endParaRPr kumimoji="0" lang="en-US" altLang="en-US" sz="1300" b="0" i="0" u="none" strike="noStrike" cap="none" normalizeH="0" baseline="0">
+              <a:ln>
+                <a:noFill/>
+              </a:ln>
+              <a:solidFill>
+                <a:schemeClr val="tx1"/>
+              </a:solidFill>
+              <a:effectLst/>
+              <a:latin typeface="Arial" panose="020B0604020202020204" pitchFamily="34" charset="0"/>
+            </a:endParaRPr>
+          </a:p>
+          <a:p>
+            <a:pPr>
+              <a:lnSpc>
+                <a:spcPct val="150000"/>
+              </a:lnSpc>
+              <a:buNone/>
+            </a:pPr>
+            <a:r>
+              <a:rPr lang="en-US" altLang="en-US" sz="1300">
+                <a:latin typeface="Arial" panose="020B0604020202020204" pitchFamily="34" charset="0"/>
+              </a:rPr>
+              <a:t>composer.json → "autoload": { "files": ["app/helpers.php"] } əlavə edib:</a:t>
+            </a:r>
+          </a:p>
+          <a:p>
+            <a:pPr>
+              <a:lnSpc>
+                <a:spcPct val="150000"/>
+              </a:lnSpc>
+              <a:buNone/>
+            </a:pPr>
+            <a:endParaRPr kumimoji="0" lang="en-US" altLang="en-US" sz="1300" b="0" i="0" u="none" strike="noStrike" cap="none" normalizeH="0" baseline="0">
+              <a:ln>
+                <a:noFill/>
+              </a:ln>
+              <a:solidFill>
+                <a:schemeClr val="tx1"/>
+              </a:solidFill>
+              <a:effectLst/>
+              <a:latin typeface="Arial" panose="020B0604020202020204" pitchFamily="34" charset="0"/>
+            </a:endParaRPr>
+          </a:p>
+          <a:p>
+            <a:pPr>
+              <a:lnSpc>
+                <a:spcPct val="150000"/>
+              </a:lnSpc>
+              <a:buNone/>
+            </a:pPr>
+            <a:endParaRPr lang="en-US" altLang="en-US" sz="1300">
+              <a:latin typeface="Arial" panose="020B0604020202020204" pitchFamily="34" charset="0"/>
+            </a:endParaRPr>
+          </a:p>
+          <a:p>
+            <a:pPr>
+              <a:lnSpc>
+                <a:spcPct val="150000"/>
+              </a:lnSpc>
+              <a:buNone/>
+            </a:pPr>
+            <a:endParaRPr kumimoji="0" lang="en-US" altLang="en-US" sz="1300" b="0" i="0" u="none" strike="noStrike" cap="none" normalizeH="0" baseline="0">
+              <a:ln>
+                <a:noFill/>
+              </a:ln>
+              <a:solidFill>
+                <a:schemeClr val="tx1"/>
+              </a:solidFill>
+              <a:effectLst/>
+              <a:latin typeface="Arial" panose="020B0604020202020204" pitchFamily="34" charset="0"/>
+            </a:endParaRPr>
+          </a:p>
+          <a:p>
+            <a:pPr>
+              <a:lnSpc>
+                <a:spcPct val="150000"/>
+              </a:lnSpc>
+              <a:buNone/>
+            </a:pPr>
+            <a:endParaRPr lang="en-US" altLang="en-US" sz="1300">
+              <a:latin typeface="Arial" panose="020B0604020202020204" pitchFamily="34" charset="0"/>
+            </a:endParaRPr>
+          </a:p>
+          <a:p>
+            <a:pPr>
+              <a:lnSpc>
+                <a:spcPct val="150000"/>
+              </a:lnSpc>
+              <a:buNone/>
+            </a:pPr>
+            <a:endParaRPr kumimoji="0" lang="en-US" altLang="en-US" sz="1300" b="0" i="0" u="none" strike="noStrike" cap="none" normalizeH="0" baseline="0">
+              <a:ln>
+                <a:noFill/>
+              </a:ln>
+              <a:solidFill>
+                <a:schemeClr val="tx1"/>
+              </a:solidFill>
+              <a:effectLst/>
+              <a:latin typeface="Arial" panose="020B0604020202020204" pitchFamily="34" charset="0"/>
+            </a:endParaRPr>
+          </a:p>
+          <a:p>
+            <a:pPr>
+              <a:lnSpc>
+                <a:spcPct val="150000"/>
+              </a:lnSpc>
+              <a:buNone/>
+            </a:pPr>
+            <a:endParaRPr lang="en-US" altLang="en-US" sz="1300">
+              <a:latin typeface="Arial" panose="020B0604020202020204" pitchFamily="34" charset="0"/>
+            </a:endParaRPr>
+          </a:p>
+          <a:p>
+            <a:pPr>
+              <a:lnSpc>
+                <a:spcPct val="150000"/>
+              </a:lnSpc>
+              <a:buNone/>
+            </a:pPr>
+            <a:r>
+              <a:rPr lang="en-US" altLang="en-US" sz="1300">
+                <a:latin typeface="Arial" panose="020B0604020202020204" pitchFamily="34" charset="0"/>
+              </a:rPr>
+              <a:t>Sonra Blade-də:</a:t>
+            </a:r>
+            <a:endParaRPr kumimoji="0" lang="en-US" altLang="en-US" sz="1300" b="0" i="0" u="none" strike="noStrike" cap="none" normalizeH="0" baseline="0">
+              <a:ln>
+                <a:noFill/>
+              </a:ln>
+              <a:solidFill>
+                <a:schemeClr val="tx1"/>
+              </a:solidFill>
+              <a:effectLst/>
+              <a:latin typeface="Arial" panose="020B0604020202020204" pitchFamily="34" charset="0"/>
+            </a:endParaRPr>
+          </a:p>
+        </p:txBody>
+      </p:sp>
+      <p:pic>
+        <p:nvPicPr>
+          <p:cNvPr id="4" name="Picture 3">
+            <a:extLst>
+              <a:ext uri="{FF2B5EF4-FFF2-40B4-BE49-F238E27FC236}">
+                <a16:creationId xmlns:a16="http://schemas.microsoft.com/office/drawing/2014/main" id="{E66CDB6E-7B63-1D1E-8A91-DF3165D34A45}"/>
+              </a:ext>
+            </a:extLst>
+          </p:cNvPr>
+          <p:cNvPicPr>
+            <a:picLocks noChangeAspect="1"/>
+          </p:cNvPicPr>
+          <p:nvPr/>
+        </p:nvPicPr>
+        <p:blipFill>
+          <a:blip r:embed="rId2"/>
+          <a:stretch>
+            <a:fillRect/>
+          </a:stretch>
+        </p:blipFill>
+        <p:spPr>
+          <a:xfrm>
+            <a:off x="0" y="824756"/>
+            <a:ext cx="5953956" cy="1286054"/>
+          </a:xfrm>
+          <a:prstGeom prst="rect">
+            <a:avLst/>
+          </a:prstGeom>
+        </p:spPr>
+      </p:pic>
+      <p:pic>
+        <p:nvPicPr>
+          <p:cNvPr id="6" name="Picture 5">
+            <a:extLst>
+              <a:ext uri="{FF2B5EF4-FFF2-40B4-BE49-F238E27FC236}">
+                <a16:creationId xmlns:a16="http://schemas.microsoft.com/office/drawing/2014/main" id="{DEB61D33-8FF1-16ED-8CA5-3D7B2E2CC70C}"/>
+              </a:ext>
+            </a:extLst>
+          </p:cNvPr>
+          <p:cNvPicPr>
+            <a:picLocks noChangeAspect="1"/>
+          </p:cNvPicPr>
+          <p:nvPr/>
+        </p:nvPicPr>
+        <p:blipFill>
+          <a:blip r:embed="rId3"/>
+          <a:stretch>
+            <a:fillRect/>
+          </a:stretch>
+        </p:blipFill>
+        <p:spPr>
+          <a:xfrm>
+            <a:off x="0" y="3068784"/>
+            <a:ext cx="1895740" cy="457264"/>
+          </a:xfrm>
+          <a:prstGeom prst="rect">
+            <a:avLst/>
+          </a:prstGeom>
+        </p:spPr>
+      </p:pic>
+      <p:pic>
+        <p:nvPicPr>
+          <p:cNvPr id="10" name="Picture 9">
+            <a:extLst>
+              <a:ext uri="{FF2B5EF4-FFF2-40B4-BE49-F238E27FC236}">
+                <a16:creationId xmlns:a16="http://schemas.microsoft.com/office/drawing/2014/main" id="{6146FA66-A053-F0B8-3B46-4DF8DCC93F8D}"/>
+              </a:ext>
+            </a:extLst>
+          </p:cNvPr>
+          <p:cNvPicPr>
+            <a:picLocks noChangeAspect="1"/>
+          </p:cNvPicPr>
+          <p:nvPr/>
+        </p:nvPicPr>
+        <p:blipFill>
+          <a:blip r:embed="rId4"/>
+          <a:stretch>
+            <a:fillRect/>
+          </a:stretch>
+        </p:blipFill>
+        <p:spPr>
+          <a:xfrm>
+            <a:off x="0" y="5119289"/>
+            <a:ext cx="3343742" cy="562053"/>
+          </a:xfrm>
+          <a:prstGeom prst="rect">
+            <a:avLst/>
+          </a:prstGeom>
+        </p:spPr>
+      </p:pic>
+    </p:spTree>
+    <p:extLst>
+      <p:ext uri="{BB962C8B-B14F-4D97-AF65-F5344CB8AC3E}">
+        <p14:creationId xmlns:p14="http://schemas.microsoft.com/office/powerpoint/2010/main" val="3763355956"/>
+      </p:ext>
+    </p:extLst>
+  </p:cSld>
+  <p:clrMapOvr>
+    <a:masterClrMapping/>
+  </p:clrMapOvr>
+</p:sld>
+</file>
+
+<file path=ppt/slides/slide9.xml><?xml version="1.0" encoding="utf-8"?>
+<p:sld xmlns:a="http://schemas.openxmlformats.org/drawingml/2006/main" xmlns:r="http://schemas.openxmlformats.org/officeDocument/2006/relationships" xmlns:p="http://schemas.openxmlformats.org/presentationml/2006/main">
+  <p:cSld>
+    <p:spTree>
+      <p:nvGrpSpPr>
+        <p:cNvPr id="1" name="">
+          <a:extLst>
+            <a:ext uri="{FF2B5EF4-FFF2-40B4-BE49-F238E27FC236}">
+              <a16:creationId xmlns:a16="http://schemas.microsoft.com/office/drawing/2014/main" id="{0F238C30-8B63-5A68-C124-BC5453B70449}"/>
+            </a:ext>
+          </a:extLst>
+        </p:cNvPr>
+        <p:cNvGrpSpPr/>
+        <p:nvPr/>
+      </p:nvGrpSpPr>
+      <p:grpSpPr>
+        <a:xfrm>
+          <a:off x="0" y="0"/>
+          <a:ext cx="0" cy="0"/>
+          <a:chOff x="0" y="0"/>
+          <a:chExt cx="0" cy="0"/>
+        </a:xfrm>
+      </p:grpSpPr>
+      <p:sp>
+        <p:nvSpPr>
+          <p:cNvPr id="3" name="TextBox 2">
+            <a:extLst>
+              <a:ext uri="{FF2B5EF4-FFF2-40B4-BE49-F238E27FC236}">
+                <a16:creationId xmlns:a16="http://schemas.microsoft.com/office/drawing/2014/main" id="{7D310AB9-933A-918A-E793-8814915FFB9B}"/>
+              </a:ext>
+            </a:extLst>
+          </p:cNvPr>
+          <p:cNvSpPr txBox="1"/>
+          <p:nvPr/>
+        </p:nvSpPr>
+        <p:spPr>
+          <a:xfrm>
+            <a:off x="217714" y="255046"/>
+            <a:ext cx="11756571" cy="6056915"/>
+          </a:xfrm>
+          <a:prstGeom prst="rect">
+            <a:avLst/>
+          </a:prstGeom>
+          <a:noFill/>
+        </p:spPr>
+        <p:txBody>
+          <a:bodyPr wrap="square">
+            <a:spAutoFit/>
+          </a:bodyPr>
+          <a:lstStyle/>
+          <a:p>
+            <a:pPr>
+              <a:lnSpc>
+                <a:spcPct val="150000"/>
+              </a:lnSpc>
+              <a:buNone/>
+            </a:pPr>
+            <a:r>
+              <a:rPr lang="en-US" altLang="en-US" sz="1300">
+                <a:latin typeface="Arial" panose="020B0604020202020204" pitchFamily="34" charset="0"/>
+              </a:rPr>
+              <a:t>Laravel-də </a:t>
+            </a:r>
+            <a:r>
+              <a:rPr lang="en-US" altLang="en-US" sz="1300" b="1">
+                <a:solidFill>
+                  <a:srgbClr val="FF0000"/>
+                </a:solidFill>
+                <a:latin typeface="Arial" panose="020B0604020202020204" pitchFamily="34" charset="0"/>
+              </a:rPr>
+              <a:t>Custom Blade Directive </a:t>
+            </a:r>
+            <a:r>
+              <a:rPr lang="en-US" altLang="en-US" sz="1300">
+                <a:latin typeface="Arial" panose="020B0604020202020204" pitchFamily="34" charset="0"/>
+              </a:rPr>
+              <a:t>yaradıb, {!! !!} yerinə məsələn @safe($slider-&gt;type) yaz</a:t>
+            </a:r>
+            <a:r>
+              <a:rPr lang="az-Latn-AZ" altLang="en-US" sz="1300">
+                <a:latin typeface="Arial" panose="020B0604020202020204" pitchFamily="34" charset="0"/>
+              </a:rPr>
+              <a:t>ada bilərik</a:t>
+            </a:r>
+            <a:r>
+              <a:rPr lang="en-US" altLang="en-US" sz="1300">
+                <a:latin typeface="Arial" panose="020B0604020202020204" pitchFamily="34" charset="0"/>
+              </a:rPr>
+              <a:t>.</a:t>
+            </a:r>
+            <a:endParaRPr lang="az-Latn-AZ" altLang="en-US" sz="1300">
+              <a:latin typeface="Arial" panose="020B0604020202020204" pitchFamily="34" charset="0"/>
+            </a:endParaRPr>
+          </a:p>
+          <a:p>
+            <a:pPr>
+              <a:lnSpc>
+                <a:spcPct val="150000"/>
+              </a:lnSpc>
+              <a:buNone/>
+            </a:pPr>
+            <a:endParaRPr kumimoji="0" lang="az-Latn-AZ" altLang="en-US" sz="1300" b="0" i="0" u="none" strike="noStrike" cap="none" normalizeH="0" baseline="0">
+              <a:ln>
+                <a:noFill/>
+              </a:ln>
+              <a:solidFill>
+                <a:schemeClr val="tx1"/>
+              </a:solidFill>
+              <a:effectLst/>
+              <a:latin typeface="Arial" panose="020B0604020202020204" pitchFamily="34" charset="0"/>
+            </a:endParaRPr>
+          </a:p>
+          <a:p>
+            <a:pPr>
+              <a:lnSpc>
+                <a:spcPct val="150000"/>
+              </a:lnSpc>
+              <a:buNone/>
+            </a:pPr>
+            <a:r>
+              <a:rPr lang="en-US" altLang="en-US" sz="1300">
+                <a:latin typeface="Arial" panose="020B0604020202020204" pitchFamily="34" charset="0"/>
+              </a:rPr>
+              <a:t>AppServiceProvider-də directive qeydiyyatı</a:t>
+            </a:r>
+            <a:r>
+              <a:rPr lang="az-Latn-AZ" altLang="en-US" sz="1300">
+                <a:latin typeface="Arial" panose="020B0604020202020204" pitchFamily="34" charset="0"/>
+              </a:rPr>
+              <a:t>: </a:t>
+            </a:r>
+            <a:r>
+              <a:rPr lang="en-US" altLang="en-US" sz="1300">
+                <a:latin typeface="Arial" panose="020B0604020202020204" pitchFamily="34" charset="0"/>
+              </a:rPr>
+              <a:t> </a:t>
+            </a:r>
+            <a:r>
+              <a:rPr lang="en-US" altLang="en-US" sz="1300" b="1">
+                <a:solidFill>
+                  <a:srgbClr val="FF0000"/>
+                </a:solidFill>
+                <a:latin typeface="Arial" panose="020B0604020202020204" pitchFamily="34" charset="0"/>
+              </a:rPr>
+              <a:t>app/Providers/AppServiceProvider.php</a:t>
+            </a:r>
+            <a:endParaRPr lang="az-Latn-AZ" altLang="en-US" sz="1300" b="1">
+              <a:solidFill>
+                <a:srgbClr val="FF0000"/>
+              </a:solidFill>
+              <a:latin typeface="Arial" panose="020B0604020202020204" pitchFamily="34" charset="0"/>
+            </a:endParaRPr>
+          </a:p>
+          <a:p>
+            <a:pPr>
+              <a:lnSpc>
+                <a:spcPct val="150000"/>
+              </a:lnSpc>
+              <a:buNone/>
+            </a:pPr>
+            <a:endParaRPr kumimoji="0" lang="az-Latn-AZ" altLang="en-US" sz="1300" b="0" i="0" u="none" strike="noStrike" cap="none" normalizeH="0" baseline="0">
+              <a:ln>
+                <a:noFill/>
+              </a:ln>
+              <a:solidFill>
+                <a:schemeClr val="tx1"/>
+              </a:solidFill>
+              <a:effectLst/>
+              <a:latin typeface="Arial" panose="020B0604020202020204" pitchFamily="34" charset="0"/>
+            </a:endParaRPr>
+          </a:p>
+          <a:p>
+            <a:pPr>
+              <a:lnSpc>
+                <a:spcPct val="150000"/>
+              </a:lnSpc>
+              <a:buNone/>
+            </a:pPr>
+            <a:endParaRPr lang="az-Latn-AZ" altLang="en-US" sz="1300">
+              <a:latin typeface="Arial" panose="020B0604020202020204" pitchFamily="34" charset="0"/>
+            </a:endParaRPr>
+          </a:p>
+          <a:p>
+            <a:pPr>
+              <a:lnSpc>
+                <a:spcPct val="150000"/>
+              </a:lnSpc>
+              <a:buNone/>
+            </a:pPr>
+            <a:endParaRPr kumimoji="0" lang="az-Latn-AZ" altLang="en-US" sz="1300" b="0" i="0" u="none" strike="noStrike" cap="none" normalizeH="0" baseline="0">
+              <a:ln>
+                <a:noFill/>
+              </a:ln>
+              <a:solidFill>
+                <a:schemeClr val="tx1"/>
+              </a:solidFill>
+              <a:effectLst/>
+              <a:latin typeface="Arial" panose="020B0604020202020204" pitchFamily="34" charset="0"/>
+            </a:endParaRPr>
+          </a:p>
+          <a:p>
+            <a:pPr>
+              <a:lnSpc>
+                <a:spcPct val="150000"/>
+              </a:lnSpc>
+              <a:buNone/>
+            </a:pPr>
+            <a:endParaRPr kumimoji="0" lang="az-Latn-AZ" altLang="en-US" sz="1300" b="0" i="0" u="none" strike="noStrike" cap="none" normalizeH="0" baseline="0">
+              <a:ln>
+                <a:noFill/>
+              </a:ln>
+              <a:solidFill>
+                <a:schemeClr val="tx1"/>
+              </a:solidFill>
+              <a:effectLst/>
+              <a:latin typeface="Arial" panose="020B0604020202020204" pitchFamily="34" charset="0"/>
+            </a:endParaRPr>
+          </a:p>
+          <a:p>
+            <a:pPr>
+              <a:lnSpc>
+                <a:spcPct val="150000"/>
+              </a:lnSpc>
+              <a:buNone/>
+            </a:pPr>
+            <a:endParaRPr lang="az-Latn-AZ" altLang="en-US" sz="1300">
+              <a:latin typeface="Arial" panose="020B0604020202020204" pitchFamily="34" charset="0"/>
+            </a:endParaRPr>
+          </a:p>
+          <a:p>
+            <a:pPr>
+              <a:lnSpc>
+                <a:spcPct val="150000"/>
+              </a:lnSpc>
+              <a:buNone/>
+            </a:pPr>
+            <a:endParaRPr kumimoji="0" lang="az-Latn-AZ" altLang="en-US" sz="1300" b="0" i="0" u="none" strike="noStrike" cap="none" normalizeH="0" baseline="0">
+              <a:ln>
+                <a:noFill/>
+              </a:ln>
+              <a:solidFill>
+                <a:schemeClr val="tx1"/>
+              </a:solidFill>
+              <a:effectLst/>
+              <a:latin typeface="Arial" panose="020B0604020202020204" pitchFamily="34" charset="0"/>
+            </a:endParaRPr>
+          </a:p>
+          <a:p>
+            <a:pPr>
+              <a:lnSpc>
+                <a:spcPct val="150000"/>
+              </a:lnSpc>
+              <a:buNone/>
+            </a:pPr>
+            <a:endParaRPr lang="az-Latn-AZ" altLang="en-US" sz="1300">
+              <a:latin typeface="Arial" panose="020B0604020202020204" pitchFamily="34" charset="0"/>
+            </a:endParaRPr>
+          </a:p>
+          <a:p>
+            <a:pPr>
+              <a:lnSpc>
+                <a:spcPct val="150000"/>
+              </a:lnSpc>
+              <a:buNone/>
+            </a:pPr>
+            <a:endParaRPr kumimoji="0" lang="az-Latn-AZ" altLang="en-US" sz="1300" b="0" i="0" u="none" strike="noStrike" cap="none" normalizeH="0" baseline="0">
+              <a:ln>
+                <a:noFill/>
+              </a:ln>
+              <a:solidFill>
+                <a:schemeClr val="tx1"/>
+              </a:solidFill>
+              <a:effectLst/>
+              <a:latin typeface="Arial" panose="020B0604020202020204" pitchFamily="34" charset="0"/>
+            </a:endParaRPr>
+          </a:p>
+          <a:p>
+            <a:pPr>
+              <a:lnSpc>
+                <a:spcPct val="150000"/>
+              </a:lnSpc>
+              <a:buNone/>
+            </a:pPr>
+            <a:endParaRPr lang="az-Latn-AZ" altLang="en-US" sz="1300">
+              <a:latin typeface="Arial" panose="020B0604020202020204" pitchFamily="34" charset="0"/>
+            </a:endParaRPr>
+          </a:p>
+          <a:p>
+            <a:pPr>
+              <a:lnSpc>
+                <a:spcPct val="150000"/>
+              </a:lnSpc>
+              <a:buNone/>
+            </a:pPr>
+            <a:endParaRPr kumimoji="0" lang="az-Latn-AZ" altLang="en-US" sz="1300" b="0" i="0" u="none" strike="noStrike" cap="none" normalizeH="0" baseline="0">
+              <a:ln>
+                <a:noFill/>
+              </a:ln>
+              <a:solidFill>
+                <a:schemeClr val="tx1"/>
+              </a:solidFill>
+              <a:effectLst/>
+              <a:latin typeface="Arial" panose="020B0604020202020204" pitchFamily="34" charset="0"/>
+            </a:endParaRPr>
+          </a:p>
+          <a:p>
+            <a:pPr>
+              <a:lnSpc>
+                <a:spcPct val="150000"/>
+              </a:lnSpc>
+              <a:buNone/>
+            </a:pPr>
+            <a:endParaRPr lang="az-Latn-AZ" altLang="en-US" sz="1300">
+              <a:latin typeface="Arial" panose="020B0604020202020204" pitchFamily="34" charset="0"/>
+            </a:endParaRPr>
+          </a:p>
+          <a:p>
+            <a:pPr>
+              <a:lnSpc>
+                <a:spcPct val="150000"/>
+              </a:lnSpc>
+              <a:buNone/>
+            </a:pPr>
+            <a:endParaRPr kumimoji="0" lang="az-Latn-AZ" altLang="en-US" sz="1300" b="0" i="0" u="none" strike="noStrike" cap="none" normalizeH="0" baseline="0">
+              <a:ln>
+                <a:noFill/>
+              </a:ln>
+              <a:solidFill>
+                <a:schemeClr val="tx1"/>
+              </a:solidFill>
+              <a:effectLst/>
+              <a:latin typeface="Arial" panose="020B0604020202020204" pitchFamily="34" charset="0"/>
+            </a:endParaRPr>
+          </a:p>
+          <a:p>
+            <a:pPr>
+              <a:lnSpc>
+                <a:spcPct val="150000"/>
+              </a:lnSpc>
+              <a:buNone/>
+            </a:pPr>
+            <a:r>
+              <a:rPr lang="en-US" altLang="en-US" sz="1300" b="1">
+                <a:latin typeface="Arial" panose="020B0604020202020204" pitchFamily="34" charset="0"/>
+              </a:rPr>
+              <a:t>Burada</a:t>
+            </a:r>
+            <a:r>
+              <a:rPr lang="en-US" altLang="en-US" sz="1300">
+                <a:latin typeface="Arial" panose="020B0604020202020204" pitchFamily="34" charset="0"/>
+              </a:rPr>
+              <a:t>:</a:t>
+            </a:r>
+          </a:p>
+          <a:p>
+            <a:pPr marL="742950" lvl="1" indent="-285750">
+              <a:lnSpc>
+                <a:spcPct val="150000"/>
+              </a:lnSpc>
+              <a:buFont typeface="Wingdings" panose="05000000000000000000" pitchFamily="2" charset="2"/>
+              <a:buChar char="q"/>
+            </a:pPr>
+            <a:r>
+              <a:rPr lang="en-US" altLang="en-US" sz="1300">
+                <a:latin typeface="Arial" panose="020B0604020202020204" pitchFamily="34" charset="0"/>
+              </a:rPr>
+              <a:t>$expression → @safe() içində göndərdiyin dəyişən və ya string.</a:t>
+            </a:r>
+          </a:p>
+          <a:p>
+            <a:pPr marL="742950" lvl="1" indent="-285750">
+              <a:lnSpc>
+                <a:spcPct val="150000"/>
+              </a:lnSpc>
+              <a:buFont typeface="Wingdings" panose="05000000000000000000" pitchFamily="2" charset="2"/>
+              <a:buChar char="q"/>
+            </a:pPr>
+            <a:r>
+              <a:rPr lang="en-US" altLang="en-US" sz="1300">
+                <a:latin typeface="Arial" panose="020B0604020202020204" pitchFamily="34" charset="0"/>
+              </a:rPr>
+              <a:t>$allowedTags → icazə verilən HTML tag-lar.</a:t>
+            </a:r>
+          </a:p>
+          <a:p>
+            <a:pPr marL="742950" lvl="1" indent="-285750">
+              <a:lnSpc>
+                <a:spcPct val="150000"/>
+              </a:lnSpc>
+              <a:buFont typeface="Wingdings" panose="05000000000000000000" pitchFamily="2" charset="2"/>
+              <a:buChar char="q"/>
+            </a:pPr>
+            <a:r>
+              <a:rPr lang="en-US" altLang="en-US" sz="1300">
+                <a:latin typeface="Arial" panose="020B0604020202020204" pitchFamily="34" charset="0"/>
+              </a:rPr>
+              <a:t>strip_tags() → təhlükəli HTML və JS kodlarını silir, yalnız icazə verilən tag-ları saxlayır.</a:t>
+            </a:r>
+            <a:endParaRPr lang="az-Latn-AZ" altLang="en-US" sz="1300">
+              <a:latin typeface="Arial" panose="020B0604020202020204" pitchFamily="34" charset="0"/>
+            </a:endParaRPr>
+          </a:p>
+          <a:p>
+            <a:pPr>
+              <a:lnSpc>
+                <a:spcPct val="150000"/>
+              </a:lnSpc>
+              <a:buNone/>
+            </a:pPr>
+            <a:endParaRPr kumimoji="0" lang="en-US" altLang="en-US" sz="1300" b="0" i="0" u="none" strike="noStrike" cap="none" normalizeH="0" baseline="0">
+              <a:ln>
+                <a:noFill/>
+              </a:ln>
+              <a:solidFill>
+                <a:schemeClr val="tx1"/>
+              </a:solidFill>
+              <a:effectLst/>
+              <a:latin typeface="Arial" panose="020B0604020202020204" pitchFamily="34" charset="0"/>
+            </a:endParaRPr>
+          </a:p>
+        </p:txBody>
+      </p:sp>
+      <p:pic>
+        <p:nvPicPr>
+          <p:cNvPr id="4" name="Picture 3">
+            <a:extLst>
+              <a:ext uri="{FF2B5EF4-FFF2-40B4-BE49-F238E27FC236}">
+                <a16:creationId xmlns:a16="http://schemas.microsoft.com/office/drawing/2014/main" id="{643DAECA-687F-1E82-AD43-758405840FE8}"/>
+              </a:ext>
+            </a:extLst>
+          </p:cNvPr>
+          <p:cNvPicPr>
+            <a:picLocks noChangeAspect="1"/>
+          </p:cNvPicPr>
+          <p:nvPr/>
+        </p:nvPicPr>
+        <p:blipFill>
+          <a:blip r:embed="rId2"/>
+          <a:stretch>
+            <a:fillRect/>
+          </a:stretch>
+        </p:blipFill>
+        <p:spPr>
+          <a:xfrm>
+            <a:off x="217714" y="1408633"/>
+            <a:ext cx="5410955" cy="2876951"/>
+          </a:xfrm>
+          <a:prstGeom prst="rect">
+            <a:avLst/>
+          </a:prstGeom>
+        </p:spPr>
+      </p:pic>
+    </p:spTree>
+    <p:extLst>
+      <p:ext uri="{BB962C8B-B14F-4D97-AF65-F5344CB8AC3E}">
+        <p14:creationId xmlns:p14="http://schemas.microsoft.com/office/powerpoint/2010/main" val="1835700398"/>
       </p:ext>
     </p:extLst>
   </p:cSld>
